--- a/docs/ShopSmart_Guard_Group5.pptx
+++ b/docs/ShopSmart_Guard_Group5.pptx
@@ -4,6 +4,9 @@
   <p:sldMasterIdLst>
     <p:sldMasterId id="2147483648" r:id="rId1"/>
   </p:sldMasterIdLst>
+  <p:notesMasterIdLst>
+    <p:notesMasterId r:id="rId14"/>
+  </p:notesMasterIdLst>
   <p:sldIdLst>
     <p:sldId id="256" r:id="rId2"/>
     <p:sldId id="257" r:id="rId3"/>
@@ -18,9 +21,6 @@
     <p:sldId id="266" r:id="rId12"/>
     <p:sldId id="267" r:id="rId13"/>
   </p:sldIdLst>
-  <p:notesMasterIdLst>
-    <p:notesMasterId r:id="rId14"/>
-  </p:notesMasterIdLst>
   <p:sldSz cx="12192000" cy="6858000"/>
   <p:notesSz cx="6858000" cy="12192000"/>
   <p:defaultTextStyle>
@@ -118,24 +118,24 @@
   <p:extLst>
     <p:ext uri="{521415D9-36F7-43E2-AB2F-B90AF26B5E84}">
       <p14:sectionLst xmlns:p14="http://schemas.microsoft.com/office/powerpoint/2010/main">
-        <p14:section name="Introduction" id="{f5436fb6-1512-2327-0167-9ca20b9e470a}">
+        <p14:section name="Introduction" id="{F5436FB6-1512-2327-0167-9CA20B9E470A}">
           <p14:sldIdLst>
             <p14:sldId id="256"/>
           </p14:sldIdLst>
         </p14:section>
-        <p14:section name="Problem" id="{88f9572a-cf5c-35dc-e284-e9622e64caf9}">
+        <p14:section name="Problem" id="{88F9572A-CF5C-35DC-E284-E9622E64CAF9}">
           <p14:sldIdLst>
             <p14:sldId id="257"/>
             <p14:sldId id="258"/>
           </p14:sldIdLst>
         </p14:section>
-        <p14:section name="System" id="{2605f962-7677-821d-49e3-59542e3ed24e}">
+        <p14:section name="System" id="{2605F962-7677-821D-49E3-59542E3ED24E}">
           <p14:sldIdLst>
             <p14:sldId id="259"/>
             <p14:sldId id="260"/>
           </p14:sldIdLst>
         </p14:section>
-        <p14:section name="Evaluation" id="{f4b42908-b3ca-5408-df46-7ecfd53bc132}">
+        <p14:section name="Evaluation" id="{F4B42908-B3CA-5408-DF46-7ECFD53BC132}">
           <p14:sldIdLst>
             <p14:sldId id="261"/>
             <p14:sldId id="262"/>
@@ -143,13 +143,13 @@
             <p14:sldId id="264"/>
           </p14:sldIdLst>
         </p14:section>
-        <p14:section name="Analysis" id="{44bdebb6-9d8b-4ce3-0038-0588c3689a4e}">
+        <p14:section name="Analysis" id="{44BDEBB6-9D8B-4CE3-0038-0588C3689A4E}">
           <p14:sldIdLst>
             <p14:sldId id="265"/>
             <p14:sldId id="266"/>
           </p14:sldIdLst>
         </p14:section>
-        <p14:section name="Close" id="{b71672d1-615d-ddad-056c-19871c63b7d5}">
+        <p14:section name="Close" id="{B71672D1-615D-DDAD-056C-19871C63B7D5}">
           <p14:sldIdLst>
             <p14:sldId id="267"/>
           </p14:sldIdLst>
@@ -163,10 +163,145 @@
 </p:presentation>
 </file>
 
+<file path=ppt/changesInfos/changesInfo1.xml><?xml version="1.0" encoding="utf-8"?>
+<pc:chgInfo xmlns:a="http://schemas.openxmlformats.org/drawingml/2006/main" xmlns:r="http://schemas.openxmlformats.org/officeDocument/2006/relationships" xmlns:ac="http://schemas.microsoft.com/office/drawing/2013/main/command" xmlns:pc="http://schemas.microsoft.com/office/powerpoint/2013/main/command">
+  <pc:docChgLst>
+    <pc:chgData name="Harshita Sharma" userId="4a237fc1a8962e1d" providerId="LiveId" clId="{1083D9DC-A289-4142-881E-E5E5B98ECCCB}"/>
+    <pc:docChg chg="undo custSel modSld">
+      <pc:chgData name="Harshita Sharma" userId="4a237fc1a8962e1d" providerId="LiveId" clId="{1083D9DC-A289-4142-881E-E5E5B98ECCCB}" dt="2026-10-24T23:10:58.337" v="8" actId="478"/>
+      <pc:docMkLst>
+        <pc:docMk/>
+      </pc:docMkLst>
+      <pc:sldChg chg="addSp delSp modSp mod">
+        <pc:chgData name="Harshita Sharma" userId="4a237fc1a8962e1d" providerId="LiveId" clId="{1083D9DC-A289-4142-881E-E5E5B98ECCCB}" dt="2026-10-24T23:10:58.337" v="8" actId="478"/>
+        <pc:sldMkLst>
+          <pc:docMk/>
+          <pc:sldMk cId="0" sldId="260"/>
+        </pc:sldMkLst>
+        <pc:spChg chg="mod">
+          <ac:chgData name="Harshita Sharma" userId="4a237fc1a8962e1d" providerId="LiveId" clId="{1083D9DC-A289-4142-881E-E5E5B98ECCCB}" dt="2026-10-24T23:10:48.198" v="4" actId="1076"/>
+          <ac:spMkLst>
+            <pc:docMk/>
+            <pc:sldMk cId="0" sldId="260"/>
+            <ac:spMk id="2" creationId="{00000000-0000-0000-0000-000000000000}"/>
+          </ac:spMkLst>
+        </pc:spChg>
+        <pc:spChg chg="mod">
+          <ac:chgData name="Harshita Sharma" userId="4a237fc1a8962e1d" providerId="LiveId" clId="{1083D9DC-A289-4142-881E-E5E5B98ECCCB}" dt="2026-10-24T23:10:54.883" v="6" actId="1076"/>
+          <ac:spMkLst>
+            <pc:docMk/>
+            <pc:sldMk cId="0" sldId="260"/>
+            <ac:spMk id="3" creationId="{00000000-0000-0000-0000-000000000000}"/>
+          </ac:spMkLst>
+        </pc:spChg>
+        <pc:spChg chg="mod">
+          <ac:chgData name="Harshita Sharma" userId="4a237fc1a8962e1d" providerId="LiveId" clId="{1083D9DC-A289-4142-881E-E5E5B98ECCCB}" dt="2026-10-24T23:10:54.883" v="6" actId="1076"/>
+          <ac:spMkLst>
+            <pc:docMk/>
+            <pc:sldMk cId="0" sldId="260"/>
+            <ac:spMk id="5" creationId="{00000000-0000-0000-0000-000000000000}"/>
+          </ac:spMkLst>
+        </pc:spChg>
+        <pc:spChg chg="mod">
+          <ac:chgData name="Harshita Sharma" userId="4a237fc1a8962e1d" providerId="LiveId" clId="{1083D9DC-A289-4142-881E-E5E5B98ECCCB}" dt="2026-10-24T23:10:54.883" v="6" actId="1076"/>
+          <ac:spMkLst>
+            <pc:docMk/>
+            <pc:sldMk cId="0" sldId="260"/>
+            <ac:spMk id="8" creationId="{00000000-0000-0000-0000-000000000000}"/>
+          </ac:spMkLst>
+        </pc:spChg>
+        <pc:spChg chg="mod">
+          <ac:chgData name="Harshita Sharma" userId="4a237fc1a8962e1d" providerId="LiveId" clId="{1083D9DC-A289-4142-881E-E5E5B98ECCCB}" dt="2026-10-24T23:10:54.883" v="6" actId="1076"/>
+          <ac:spMkLst>
+            <pc:docMk/>
+            <pc:sldMk cId="0" sldId="260"/>
+            <ac:spMk id="10" creationId="{00000000-0000-0000-0000-000000000000}"/>
+          </ac:spMkLst>
+        </pc:spChg>
+        <pc:spChg chg="mod">
+          <ac:chgData name="Harshita Sharma" userId="4a237fc1a8962e1d" providerId="LiveId" clId="{1083D9DC-A289-4142-881E-E5E5B98ECCCB}" dt="2026-10-24T23:10:54.883" v="6" actId="1076"/>
+          <ac:spMkLst>
+            <pc:docMk/>
+            <pc:sldMk cId="0" sldId="260"/>
+            <ac:spMk id="13" creationId="{00000000-0000-0000-0000-000000000000}"/>
+          </ac:spMkLst>
+        </pc:spChg>
+        <pc:spChg chg="mod">
+          <ac:chgData name="Harshita Sharma" userId="4a237fc1a8962e1d" providerId="LiveId" clId="{1083D9DC-A289-4142-881E-E5E5B98ECCCB}" dt="2026-10-24T23:10:54.883" v="6" actId="1076"/>
+          <ac:spMkLst>
+            <pc:docMk/>
+            <pc:sldMk cId="0" sldId="260"/>
+            <ac:spMk id="14" creationId="{00000000-0000-0000-0000-000000000000}"/>
+          </ac:spMkLst>
+        </pc:spChg>
+        <pc:spChg chg="mod">
+          <ac:chgData name="Harshita Sharma" userId="4a237fc1a8962e1d" providerId="LiveId" clId="{1083D9DC-A289-4142-881E-E5E5B98ECCCB}" dt="2026-10-24T23:10:54.883" v="6" actId="1076"/>
+          <ac:spMkLst>
+            <pc:docMk/>
+            <pc:sldMk cId="0" sldId="260"/>
+            <ac:spMk id="15" creationId="{00000000-0000-0000-0000-000000000000}"/>
+          </ac:spMkLst>
+        </pc:spChg>
+        <pc:spChg chg="mod">
+          <ac:chgData name="Harshita Sharma" userId="4a237fc1a8962e1d" providerId="LiveId" clId="{1083D9DC-A289-4142-881E-E5E5B98ECCCB}" dt="2026-10-24T23:10:54.883" v="6" actId="1076"/>
+          <ac:spMkLst>
+            <pc:docMk/>
+            <pc:sldMk cId="0" sldId="260"/>
+            <ac:spMk id="18" creationId="{00000000-0000-0000-0000-000000000000}"/>
+          </ac:spMkLst>
+        </pc:spChg>
+        <pc:spChg chg="mod">
+          <ac:chgData name="Harshita Sharma" userId="4a237fc1a8962e1d" providerId="LiveId" clId="{1083D9DC-A289-4142-881E-E5E5B98ECCCB}" dt="2026-10-24T23:10:54.883" v="6" actId="1076"/>
+          <ac:spMkLst>
+            <pc:docMk/>
+            <pc:sldMk cId="0" sldId="260"/>
+            <ac:spMk id="19" creationId="{00000000-0000-0000-0000-000000000000}"/>
+          </ac:spMkLst>
+        </pc:spChg>
+        <pc:spChg chg="mod">
+          <ac:chgData name="Harshita Sharma" userId="4a237fc1a8962e1d" providerId="LiveId" clId="{1083D9DC-A289-4142-881E-E5E5B98ECCCB}" dt="2026-10-24T23:10:54.883" v="6" actId="1076"/>
+          <ac:spMkLst>
+            <pc:docMk/>
+            <pc:sldMk cId="0" sldId="260"/>
+            <ac:spMk id="20" creationId="{00000000-0000-0000-0000-000000000000}"/>
+          </ac:spMkLst>
+        </pc:spChg>
+        <pc:spChg chg="add del">
+          <ac:chgData name="Harshita Sharma" userId="4a237fc1a8962e1d" providerId="LiveId" clId="{1083D9DC-A289-4142-881E-E5E5B98ECCCB}" dt="2026-10-24T23:10:58.337" v="8" actId="478"/>
+          <ac:spMkLst>
+            <pc:docMk/>
+            <pc:sldMk cId="0" sldId="260"/>
+            <ac:spMk id="22" creationId="{00000000-0000-0000-0000-000000000000}"/>
+          </ac:spMkLst>
+        </pc:spChg>
+        <pc:spChg chg="del">
+          <ac:chgData name="Harshita Sharma" userId="4a237fc1a8962e1d" providerId="LiveId" clId="{1083D9DC-A289-4142-881E-E5E5B98ECCCB}" dt="2026-10-24T23:10:38.197" v="0" actId="478"/>
+          <ac:spMkLst>
+            <pc:docMk/>
+            <pc:sldMk cId="0" sldId="260"/>
+            <ac:spMk id="24" creationId="{00000000-0000-0000-0000-000000000000}"/>
+          </ac:spMkLst>
+        </pc:spChg>
+        <pc:picChg chg="del">
+          <ac:chgData name="Harshita Sharma" userId="4a237fc1a8962e1d" providerId="LiveId" clId="{1083D9DC-A289-4142-881E-E5E5B98ECCCB}" dt="2026-10-24T23:10:40.305" v="1" actId="478"/>
+          <ac:picMkLst>
+            <pc:docMk/>
+            <pc:sldMk cId="0" sldId="260"/>
+            <ac:picMk id="23" creationId="{00000000-0000-0000-0000-000000000000}"/>
+          </ac:picMkLst>
+        </pc:picChg>
+      </pc:sldChg>
+    </pc:docChg>
+  </pc:docChgLst>
+</pc:chgInfo>
+</file>
+
 <file path=ppt/charts/chart1.xml><?xml version="1.0" encoding="utf-8"?>
-<c:chartSpace xmlns:c="http://schemas.openxmlformats.org/drawingml/2006/chart" xmlns:a="http://schemas.openxmlformats.org/drawingml/2006/main" xmlns:r="http://schemas.openxmlformats.org/officeDocument/2006/relationships">
+<c:chartSpace xmlns:c="http://schemas.openxmlformats.org/drawingml/2006/chart" xmlns:a="http://schemas.openxmlformats.org/drawingml/2006/main" xmlns:r="http://schemas.openxmlformats.org/officeDocument/2006/relationships" xmlns:c16r2="http://schemas.microsoft.com/office/drawing/2015/06/chart">
   <c:date1904 val="0"/>
+  <c:lang val="en-US"/>
   <c:roundedCorners val="1"/>
+  <c:style val="2"/>
   <c:chart>
     <c:title>
       <c:tx>
@@ -194,7 +329,6 @@
           </a:p>
         </c:rich>
       </c:tx>
-      <c:layout/>
       <c:overlay val="0"/>
     </c:title>
     <c:autoTitleDeleted val="0"/>
@@ -227,18 +361,26 @@
           <c:invertIfNegative val="0"/>
           <c:dLbls>
             <c:numFmt formatCode="0.0&quot;%&quot;" sourceLinked="0"/>
+            <c:spPr>
+              <a:noFill/>
+              <a:ln>
+                <a:noFill/>
+              </a:ln>
+              <a:effectLst/>
+            </c:spPr>
             <c:txPr>
               <a:bodyPr/>
               <a:lstStyle/>
               <a:p>
                 <a:pPr>
-                  <a:defRPr b="0" i="0" strike="noStrike" sz="1200" u="none">
+                  <a:defRPr sz="1200" b="0" i="0" u="none" strike="noStrike">
                     <a:solidFill>
                       <a:srgbClr val="1B1F2A"/>
                     </a:solidFill>
                     <a:latin typeface="+mn-lt"/>
                   </a:defRPr>
                 </a:pPr>
+                <a:endParaRPr lang="en-US"/>
               </a:p>
             </c:txPr>
             <c:showLegendKey val="0"/>
@@ -248,25 +390,28 @@
             <c:showPercent val="0"/>
             <c:showBubbleSize val="0"/>
             <c:showLeaderLines val="0"/>
+            <c:extLst>
+              <c:ext xmlns:c15="http://schemas.microsoft.com/office/drawing/2012/chart" uri="{CE6537A1-D6FC-4f65-9D91-7224C49458BB}">
+                <c15:showLeaderLines val="0"/>
+              </c:ext>
+            </c:extLst>
           </c:dLbls>
           <c:cat>
-            <c:multiLvlStrRef>
+            <c:strRef>
               <c:f>Sheet1!$A$2:$A$4</c:f>
-              <c:multiLvlStrCache>
+              <c:strCache>
                 <c:ptCount val="3"/>
-                <c:lvl>
-                  <c:pt idx="0">
-                    <c:v>Attack success (main)</c:v>
-                  </c:pt>
-                  <c:pt idx="1">
-                    <c:v>Attack success (held-out)</c:v>
-                  </c:pt>
-                  <c:pt idx="2">
-                    <c:v>False positives</c:v>
-                  </c:pt>
-                </c:lvl>
-              </c:multiLvlStrCache>
-            </c:multiLvlStrRef>
+                <c:pt idx="0">
+                  <c:v>Attack success (main)</c:v>
+                </c:pt>
+                <c:pt idx="1">
+                  <c:v>Attack success (held-out)</c:v>
+                </c:pt>
+                <c:pt idx="2">
+                  <c:v>False positives</c:v>
+                </c:pt>
+              </c:strCache>
+            </c:strRef>
           </c:cat>
           <c:val>
             <c:numRef>
@@ -286,6 +431,11 @@
               </c:numCache>
             </c:numRef>
           </c:val>
+          <c:extLst>
+            <c:ext xmlns:c16="http://schemas.microsoft.com/office/drawing/2014/chart" uri="{C3380CC4-5D6E-409C-BE32-E72D297353CC}">
+              <c16:uniqueId val="{00000000-90D0-41C8-AFA7-81E8732F1BB9}"/>
+            </c:ext>
+          </c:extLst>
         </c:ser>
         <c:ser>
           <c:idx val="1"/>
@@ -310,18 +460,26 @@
           <c:invertIfNegative val="0"/>
           <c:dLbls>
             <c:numFmt formatCode="0.0&quot;%&quot;" sourceLinked="0"/>
+            <c:spPr>
+              <a:noFill/>
+              <a:ln>
+                <a:noFill/>
+              </a:ln>
+              <a:effectLst/>
+            </c:spPr>
             <c:txPr>
               <a:bodyPr/>
               <a:lstStyle/>
               <a:p>
                 <a:pPr>
-                  <a:defRPr b="0" i="0" strike="noStrike" sz="1200" u="none">
+                  <a:defRPr sz="1200" b="0" i="0" u="none" strike="noStrike">
                     <a:solidFill>
                       <a:srgbClr val="1B1F2A"/>
                     </a:solidFill>
                     <a:latin typeface="+mn-lt"/>
                   </a:defRPr>
                 </a:pPr>
+                <a:endParaRPr lang="en-US"/>
               </a:p>
             </c:txPr>
             <c:showLegendKey val="0"/>
@@ -331,25 +489,28 @@
             <c:showPercent val="0"/>
             <c:showBubbleSize val="0"/>
             <c:showLeaderLines val="0"/>
+            <c:extLst>
+              <c:ext xmlns:c15="http://schemas.microsoft.com/office/drawing/2012/chart" uri="{CE6537A1-D6FC-4f65-9D91-7224C49458BB}">
+                <c15:showLeaderLines val="0"/>
+              </c:ext>
+            </c:extLst>
           </c:dLbls>
           <c:cat>
-            <c:multiLvlStrRef>
+            <c:strRef>
               <c:f>Sheet1!$A$2:$A$4</c:f>
-              <c:multiLvlStrCache>
+              <c:strCache>
                 <c:ptCount val="3"/>
-                <c:lvl>
-                  <c:pt idx="0">
-                    <c:v>Attack success (main)</c:v>
-                  </c:pt>
-                  <c:pt idx="1">
-                    <c:v>Attack success (held-out)</c:v>
-                  </c:pt>
-                  <c:pt idx="2">
-                    <c:v>False positives</c:v>
-                  </c:pt>
-                </c:lvl>
-              </c:multiLvlStrCache>
-            </c:multiLvlStrRef>
+                <c:pt idx="0">
+                  <c:v>Attack success (main)</c:v>
+                </c:pt>
+                <c:pt idx="1">
+                  <c:v>Attack success (held-out)</c:v>
+                </c:pt>
+                <c:pt idx="2">
+                  <c:v>False positives</c:v>
+                </c:pt>
+              </c:strCache>
+            </c:strRef>
           </c:cat>
           <c:val>
             <c:numRef>
@@ -369,36 +530,23 @@
               </c:numCache>
             </c:numRef>
           </c:val>
+          <c:extLst>
+            <c:ext xmlns:c16="http://schemas.microsoft.com/office/drawing/2014/chart" uri="{C3380CC4-5D6E-409C-BE32-E72D297353CC}">
+              <c16:uniqueId val="{00000001-90D0-41C8-AFA7-81E8732F1BB9}"/>
+            </c:ext>
+          </c:extLst>
         </c:ser>
         <c:dLbls>
-          <c:numFmt formatCode="0.0&quot;%&quot;" sourceLinked="0"/>
-          <c:txPr>
-            <a:bodyPr/>
-            <a:lstStyle/>
-            <a:p>
-              <a:pPr>
-                <a:defRPr b="0" i="0" strike="noStrike" sz="1200" u="none">
-                  <a:solidFill>
-                    <a:srgbClr val="1B1F2A"/>
-                  </a:solidFill>
-                  <a:latin typeface="+mn-lt"/>
-                </a:defRPr>
-              </a:pPr>
-            </a:p>
-          </c:txPr>
           <c:showLegendKey val="0"/>
           <c:showVal val="1"/>
           <c:showCatName val="0"/>
           <c:showSerName val="0"/>
           <c:showPercent val="0"/>
           <c:showBubbleSize val="0"/>
-          <c:showLeaderLines val="0"/>
         </c:dLbls>
         <c:gapWidth val="60"/>
-        <c:overlap val="0"/>
         <c:axId val="2094734554"/>
         <c:axId val="2094734552"/>
-        <c:axId val="2094734556"/>
       </c:barChart>
       <c:catAx>
         <c:axId val="2094734554"/>
@@ -439,6 +587,7 @@
         <c:crosses val="autoZero"/>
         <c:auto val="1"/>
         <c:lblAlgn val="ctr"/>
+        <c:lblOffset val="100"/>
         <c:noMultiLvlLbl val="1"/>
       </c:catAx>
       <c:valAx>
@@ -524,6 +673,7 @@
     </c:legend>
     <c:plotVisOnly val="1"/>
     <c:dispBlanksAs val="span"/>
+    <c:showDLblsOverMax val="1"/>
   </c:chart>
   <c:spPr>
     <a:noFill/>
@@ -539,9 +689,11 @@
 </file>
 
 <file path=ppt/charts/chart2.xml><?xml version="1.0" encoding="utf-8"?>
-<c:chartSpace xmlns:c="http://schemas.openxmlformats.org/drawingml/2006/chart" xmlns:a="http://schemas.openxmlformats.org/drawingml/2006/main" xmlns:r="http://schemas.openxmlformats.org/officeDocument/2006/relationships">
+<c:chartSpace xmlns:c="http://schemas.openxmlformats.org/drawingml/2006/chart" xmlns:a="http://schemas.openxmlformats.org/drawingml/2006/main" xmlns:r="http://schemas.openxmlformats.org/officeDocument/2006/relationships" xmlns:c16r2="http://schemas.microsoft.com/office/drawing/2015/06/chart">
   <c:date1904 val="0"/>
+  <c:lang val="en-US"/>
   <c:roundedCorners val="1"/>
+  <c:style val="2"/>
   <c:chart>
     <c:title>
       <c:tx>
@@ -569,7 +721,6 @@
           </a:p>
         </c:rich>
       </c:tx>
-      <c:layout/>
       <c:overlay val="0"/>
     </c:title>
     <c:autoTitleDeleted val="0"/>
@@ -602,18 +753,26 @@
           <c:invertIfNegative val="0"/>
           <c:dLbls>
             <c:numFmt formatCode="General&quot;%&quot;" sourceLinked="0"/>
+            <c:spPr>
+              <a:noFill/>
+              <a:ln>
+                <a:noFill/>
+              </a:ln>
+              <a:effectLst/>
+            </c:spPr>
             <c:txPr>
               <a:bodyPr/>
               <a:lstStyle/>
               <a:p>
                 <a:pPr>
-                  <a:defRPr b="0" i="0" strike="noStrike" sz="1000" u="none">
+                  <a:defRPr sz="1000" b="0" i="0" u="none" strike="noStrike">
                     <a:solidFill>
                       <a:srgbClr val="1B1F2A"/>
                     </a:solidFill>
                     <a:latin typeface="+mn-lt"/>
                   </a:defRPr>
                 </a:pPr>
+                <a:endParaRPr lang="en-US"/>
               </a:p>
             </c:txPr>
             <c:showLegendKey val="0"/>
@@ -623,34 +782,37 @@
             <c:showPercent val="0"/>
             <c:showBubbleSize val="0"/>
             <c:showLeaderLines val="0"/>
+            <c:extLst>
+              <c:ext xmlns:c15="http://schemas.microsoft.com/office/drawing/2012/chart" uri="{CE6537A1-D6FC-4f65-9D91-7224C49458BB}">
+                <c15:showLeaderLines val="0"/>
+              </c:ext>
+            </c:extLst>
           </c:dLbls>
           <c:cat>
-            <c:multiLvlStrRef>
+            <c:strRef>
               <c:f>Sheet1!$A$2:$A$7</c:f>
-              <c:multiLvlStrCache>
+              <c:strCache>
                 <c:ptCount val="6"/>
-                <c:lvl>
-                  <c:pt idx="0">
-                    <c:v>Baseline</c:v>
-                  </c:pt>
-                  <c:pt idx="1">
-                    <c:v>Privilege sep.</c:v>
-                  </c:pt>
-                  <c:pt idx="2">
-                    <c:v>Input filter</c:v>
-                  </c:pt>
-                  <c:pt idx="3">
-                    <c:v>LLM judge</c:v>
-                  </c:pt>
-                  <c:pt idx="4">
-                    <c:v>Output filter</c:v>
-                  </c:pt>
-                  <c:pt idx="5">
-                    <c:v>Full stack</c:v>
-                  </c:pt>
-                </c:lvl>
-              </c:multiLvlStrCache>
-            </c:multiLvlStrRef>
+                <c:pt idx="0">
+                  <c:v>Baseline</c:v>
+                </c:pt>
+                <c:pt idx="1">
+                  <c:v>Privilege sep.</c:v>
+                </c:pt>
+                <c:pt idx="2">
+                  <c:v>Input filter</c:v>
+                </c:pt>
+                <c:pt idx="3">
+                  <c:v>LLM judge</c:v>
+                </c:pt>
+                <c:pt idx="4">
+                  <c:v>Output filter</c:v>
+                </c:pt>
+                <c:pt idx="5">
+                  <c:v>Full stack</c:v>
+                </c:pt>
+              </c:strCache>
+            </c:strRef>
           </c:cat>
           <c:val>
             <c:numRef>
@@ -679,6 +841,11 @@
               </c:numCache>
             </c:numRef>
           </c:val>
+          <c:extLst>
+            <c:ext xmlns:c16="http://schemas.microsoft.com/office/drawing/2014/chart" uri="{C3380CC4-5D6E-409C-BE32-E72D297353CC}">
+              <c16:uniqueId val="{00000000-F199-44DD-B2BC-5182224DF893}"/>
+            </c:ext>
+          </c:extLst>
         </c:ser>
         <c:ser>
           <c:idx val="1"/>
@@ -703,18 +870,26 @@
           <c:invertIfNegative val="0"/>
           <c:dLbls>
             <c:numFmt formatCode="General&quot;%&quot;" sourceLinked="0"/>
+            <c:spPr>
+              <a:noFill/>
+              <a:ln>
+                <a:noFill/>
+              </a:ln>
+              <a:effectLst/>
+            </c:spPr>
             <c:txPr>
               <a:bodyPr/>
               <a:lstStyle/>
               <a:p>
                 <a:pPr>
-                  <a:defRPr b="0" i="0" strike="noStrike" sz="1000" u="none">
+                  <a:defRPr sz="1000" b="0" i="0" u="none" strike="noStrike">
                     <a:solidFill>
                       <a:srgbClr val="1B1F2A"/>
                     </a:solidFill>
                     <a:latin typeface="+mn-lt"/>
                   </a:defRPr>
                 </a:pPr>
+                <a:endParaRPr lang="en-US"/>
               </a:p>
             </c:txPr>
             <c:showLegendKey val="0"/>
@@ -724,34 +899,37 @@
             <c:showPercent val="0"/>
             <c:showBubbleSize val="0"/>
             <c:showLeaderLines val="0"/>
+            <c:extLst>
+              <c:ext xmlns:c15="http://schemas.microsoft.com/office/drawing/2012/chart" uri="{CE6537A1-D6FC-4f65-9D91-7224C49458BB}">
+                <c15:showLeaderLines val="0"/>
+              </c:ext>
+            </c:extLst>
           </c:dLbls>
           <c:cat>
-            <c:multiLvlStrRef>
+            <c:strRef>
               <c:f>Sheet1!$A$2:$A$7</c:f>
-              <c:multiLvlStrCache>
+              <c:strCache>
                 <c:ptCount val="6"/>
-                <c:lvl>
-                  <c:pt idx="0">
-                    <c:v>Baseline</c:v>
-                  </c:pt>
-                  <c:pt idx="1">
-                    <c:v>Privilege sep.</c:v>
-                  </c:pt>
-                  <c:pt idx="2">
-                    <c:v>Input filter</c:v>
-                  </c:pt>
-                  <c:pt idx="3">
-                    <c:v>LLM judge</c:v>
-                  </c:pt>
-                  <c:pt idx="4">
-                    <c:v>Output filter</c:v>
-                  </c:pt>
-                  <c:pt idx="5">
-                    <c:v>Full stack</c:v>
-                  </c:pt>
-                </c:lvl>
-              </c:multiLvlStrCache>
-            </c:multiLvlStrRef>
+                <c:pt idx="0">
+                  <c:v>Baseline</c:v>
+                </c:pt>
+                <c:pt idx="1">
+                  <c:v>Privilege sep.</c:v>
+                </c:pt>
+                <c:pt idx="2">
+                  <c:v>Input filter</c:v>
+                </c:pt>
+                <c:pt idx="3">
+                  <c:v>LLM judge</c:v>
+                </c:pt>
+                <c:pt idx="4">
+                  <c:v>Output filter</c:v>
+                </c:pt>
+                <c:pt idx="5">
+                  <c:v>Full stack</c:v>
+                </c:pt>
+              </c:strCache>
+            </c:strRef>
           </c:cat>
           <c:val>
             <c:numRef>
@@ -769,7 +947,7 @@
                   <c:v>50</c:v>
                 </c:pt>
                 <c:pt idx="3">
-                  <c:v>8.3</c:v>
+                  <c:v>8.3000000000000007</c:v>
                 </c:pt>
                 <c:pt idx="4">
                   <c:v>0</c:v>
@@ -780,6 +958,11 @@
               </c:numCache>
             </c:numRef>
           </c:val>
+          <c:extLst>
+            <c:ext xmlns:c16="http://schemas.microsoft.com/office/drawing/2014/chart" uri="{C3380CC4-5D6E-409C-BE32-E72D297353CC}">
+              <c16:uniqueId val="{00000001-F199-44DD-B2BC-5182224DF893}"/>
+            </c:ext>
+          </c:extLst>
         </c:ser>
         <c:ser>
           <c:idx val="2"/>
@@ -804,18 +987,26 @@
           <c:invertIfNegative val="0"/>
           <c:dLbls>
             <c:numFmt formatCode="General&quot;%&quot;" sourceLinked="0"/>
+            <c:spPr>
+              <a:noFill/>
+              <a:ln>
+                <a:noFill/>
+              </a:ln>
+              <a:effectLst/>
+            </c:spPr>
             <c:txPr>
               <a:bodyPr/>
               <a:lstStyle/>
               <a:p>
                 <a:pPr>
-                  <a:defRPr b="0" i="0" strike="noStrike" sz="1000" u="none">
+                  <a:defRPr sz="1000" b="0" i="0" u="none" strike="noStrike">
                     <a:solidFill>
                       <a:srgbClr val="1B1F2A"/>
                     </a:solidFill>
                     <a:latin typeface="+mn-lt"/>
                   </a:defRPr>
                 </a:pPr>
+                <a:endParaRPr lang="en-US"/>
               </a:p>
             </c:txPr>
             <c:showLegendKey val="0"/>
@@ -825,34 +1016,37 @@
             <c:showPercent val="0"/>
             <c:showBubbleSize val="0"/>
             <c:showLeaderLines val="0"/>
+            <c:extLst>
+              <c:ext xmlns:c15="http://schemas.microsoft.com/office/drawing/2012/chart" uri="{CE6537A1-D6FC-4f65-9D91-7224C49458BB}">
+                <c15:showLeaderLines val="0"/>
+              </c:ext>
+            </c:extLst>
           </c:dLbls>
           <c:cat>
-            <c:multiLvlStrRef>
+            <c:strRef>
               <c:f>Sheet1!$A$2:$A$7</c:f>
-              <c:multiLvlStrCache>
+              <c:strCache>
                 <c:ptCount val="6"/>
-                <c:lvl>
-                  <c:pt idx="0">
-                    <c:v>Baseline</c:v>
-                  </c:pt>
-                  <c:pt idx="1">
-                    <c:v>Privilege sep.</c:v>
-                  </c:pt>
-                  <c:pt idx="2">
-                    <c:v>Input filter</c:v>
-                  </c:pt>
-                  <c:pt idx="3">
-                    <c:v>LLM judge</c:v>
-                  </c:pt>
-                  <c:pt idx="4">
-                    <c:v>Output filter</c:v>
-                  </c:pt>
-                  <c:pt idx="5">
-                    <c:v>Full stack</c:v>
-                  </c:pt>
-                </c:lvl>
-              </c:multiLvlStrCache>
-            </c:multiLvlStrRef>
+                <c:pt idx="0">
+                  <c:v>Baseline</c:v>
+                </c:pt>
+                <c:pt idx="1">
+                  <c:v>Privilege sep.</c:v>
+                </c:pt>
+                <c:pt idx="2">
+                  <c:v>Input filter</c:v>
+                </c:pt>
+                <c:pt idx="3">
+                  <c:v>LLM judge</c:v>
+                </c:pt>
+                <c:pt idx="4">
+                  <c:v>Output filter</c:v>
+                </c:pt>
+                <c:pt idx="5">
+                  <c:v>Full stack</c:v>
+                </c:pt>
+              </c:strCache>
+            </c:strRef>
           </c:cat>
           <c:val>
             <c:numRef>
@@ -881,36 +1075,23 @@
               </c:numCache>
             </c:numRef>
           </c:val>
+          <c:extLst>
+            <c:ext xmlns:c16="http://schemas.microsoft.com/office/drawing/2014/chart" uri="{C3380CC4-5D6E-409C-BE32-E72D297353CC}">
+              <c16:uniqueId val="{00000002-F199-44DD-B2BC-5182224DF893}"/>
+            </c:ext>
+          </c:extLst>
         </c:ser>
         <c:dLbls>
-          <c:numFmt formatCode="General&quot;%&quot;" sourceLinked="0"/>
-          <c:txPr>
-            <a:bodyPr/>
-            <a:lstStyle/>
-            <a:p>
-              <a:pPr>
-                <a:defRPr b="0" i="0" strike="noStrike" sz="1000" u="none">
-                  <a:solidFill>
-                    <a:srgbClr val="1B1F2A"/>
-                  </a:solidFill>
-                  <a:latin typeface="+mn-lt"/>
-                </a:defRPr>
-              </a:pPr>
-            </a:p>
-          </c:txPr>
           <c:showLegendKey val="0"/>
           <c:showVal val="1"/>
           <c:showCatName val="0"/>
           <c:showSerName val="0"/>
           <c:showPercent val="0"/>
           <c:showBubbleSize val="0"/>
-          <c:showLeaderLines val="0"/>
         </c:dLbls>
         <c:gapWidth val="50"/>
-        <c:overlap val="0"/>
         <c:axId val="2094734554"/>
         <c:axId val="2094734552"/>
-        <c:axId val="2094734556"/>
       </c:barChart>
       <c:catAx>
         <c:axId val="2094734554"/>
@@ -951,6 +1132,7 @@
         <c:crosses val="autoZero"/>
         <c:auto val="1"/>
         <c:lblAlgn val="ctr"/>
+        <c:lblOffset val="100"/>
         <c:noMultiLvlLbl val="1"/>
       </c:catAx>
       <c:valAx>
@@ -1036,6 +1218,7 @@
     </c:legend>
     <c:plotVisOnly val="1"/>
     <c:dispBlanksAs val="span"/>
+    <c:showDLblsOverMax val="1"/>
   </c:chart>
   <c:spPr>
     <a:noFill/>
@@ -1051,9 +1234,11 @@
 </file>
 
 <file path=ppt/charts/chart3.xml><?xml version="1.0" encoding="utf-8"?>
-<c:chartSpace xmlns:c="http://schemas.openxmlformats.org/drawingml/2006/chart" xmlns:a="http://schemas.openxmlformats.org/drawingml/2006/main" xmlns:r="http://schemas.openxmlformats.org/officeDocument/2006/relationships">
+<c:chartSpace xmlns:c="http://schemas.openxmlformats.org/drawingml/2006/chart" xmlns:a="http://schemas.openxmlformats.org/drawingml/2006/main" xmlns:r="http://schemas.openxmlformats.org/officeDocument/2006/relationships" xmlns:c16r2="http://schemas.microsoft.com/office/drawing/2015/06/chart">
   <c:date1904 val="0"/>
+  <c:lang val="en-US"/>
   <c:roundedCorners val="1"/>
+  <c:style val="2"/>
   <c:chart>
     <c:title>
       <c:tx>
@@ -1081,7 +1266,6 @@
           </a:p>
         </c:rich>
       </c:tx>
-      <c:layout/>
       <c:overlay val="0"/>
     </c:title>
     <c:autoTitleDeleted val="0"/>
@@ -1114,18 +1298,26 @@
           <c:invertIfNegative val="0"/>
           <c:dLbls>
             <c:numFmt formatCode="0&quot;%&quot;" sourceLinked="0"/>
+            <c:spPr>
+              <a:noFill/>
+              <a:ln>
+                <a:noFill/>
+              </a:ln>
+              <a:effectLst/>
+            </c:spPr>
             <c:txPr>
               <a:bodyPr/>
               <a:lstStyle/>
               <a:p>
                 <a:pPr>
-                  <a:defRPr b="0" i="0" strike="noStrike" sz="1200" u="none">
+                  <a:defRPr sz="1200" b="0" i="0" u="none" strike="noStrike">
                     <a:solidFill>
                       <a:srgbClr val="1B1F2A"/>
                     </a:solidFill>
                     <a:latin typeface="+mn-lt"/>
                   </a:defRPr>
                 </a:pPr>
+                <a:endParaRPr lang="en-US"/>
               </a:p>
             </c:txPr>
             <c:showLegendKey val="0"/>
@@ -1135,40 +1327,43 @@
             <c:showPercent val="0"/>
             <c:showBubbleSize val="0"/>
             <c:showLeaderLines val="0"/>
+            <c:extLst>
+              <c:ext xmlns:c15="http://schemas.microsoft.com/office/drawing/2012/chart" uri="{CE6537A1-D6FC-4f65-9D91-7224C49458BB}">
+                <c15:showLeaderLines val="0"/>
+              </c:ext>
+            </c:extLst>
           </c:dLbls>
           <c:cat>
-            <c:multiLvlStrRef>
+            <c:strRef>
               <c:f>Sheet1!$A$2:$A$9</c:f>
-              <c:multiLvlStrCache>
+              <c:strCache>
                 <c:ptCount val="8"/>
-                <c:lvl>
-                  <c:pt idx="0">
-                    <c:v>System prompt extraction (0/3)</c:v>
-                  </c:pt>
-                  <c:pt idx="1">
-                    <c:v>Role-play / authority (0/6)</c:v>
-                  </c:pt>
-                  <c:pt idx="2">
-                    <c:v>Policy manipulation (0/3)</c:v>
-                  </c:pt>
-                  <c:pt idx="3">
-                    <c:v>Multi-turn manipulation (1/6)</c:v>
-                  </c:pt>
-                  <c:pt idx="4">
-                    <c:v>Indirect: uploaded document (1/6)</c:v>
-                  </c:pt>
-                  <c:pt idx="5">
-                    <c:v>Encoding / transformation (1/6)</c:v>
-                  </c:pt>
-                  <c:pt idx="6">
-                    <c:v>Direct injection (1/6)</c:v>
-                  </c:pt>
-                  <c:pt idx="7">
-                    <c:v>Indirect: poisoned product page (4/4)</c:v>
-                  </c:pt>
-                </c:lvl>
-              </c:multiLvlStrCache>
-            </c:multiLvlStrRef>
+                <c:pt idx="0">
+                  <c:v>System prompt extraction (0/3)</c:v>
+                </c:pt>
+                <c:pt idx="1">
+                  <c:v>Role-play / authority (0/6)</c:v>
+                </c:pt>
+                <c:pt idx="2">
+                  <c:v>Policy manipulation (0/3)</c:v>
+                </c:pt>
+                <c:pt idx="3">
+                  <c:v>Multi-turn manipulation (1/6)</c:v>
+                </c:pt>
+                <c:pt idx="4">
+                  <c:v>Indirect: uploaded document (1/6)</c:v>
+                </c:pt>
+                <c:pt idx="5">
+                  <c:v>Encoding / transformation (1/6)</c:v>
+                </c:pt>
+                <c:pt idx="6">
+                  <c:v>Direct injection (1/6)</c:v>
+                </c:pt>
+                <c:pt idx="7">
+                  <c:v>Indirect: poisoned product page (4/4)</c:v>
+                </c:pt>
+              </c:strCache>
+            </c:strRef>
           </c:cat>
           <c:val>
             <c:numRef>
@@ -1203,36 +1398,23 @@
               </c:numCache>
             </c:numRef>
           </c:val>
+          <c:extLst>
+            <c:ext xmlns:c16="http://schemas.microsoft.com/office/drawing/2014/chart" uri="{C3380CC4-5D6E-409C-BE32-E72D297353CC}">
+              <c16:uniqueId val="{00000000-EFA4-4695-B757-DC39BE72B2FC}"/>
+            </c:ext>
+          </c:extLst>
         </c:ser>
         <c:dLbls>
-          <c:numFmt formatCode="0&quot;%&quot;" sourceLinked="0"/>
-          <c:txPr>
-            <a:bodyPr/>
-            <a:lstStyle/>
-            <a:p>
-              <a:pPr>
-                <a:defRPr b="0" i="0" strike="noStrike" sz="1200" u="none">
-                  <a:solidFill>
-                    <a:srgbClr val="1B1F2A"/>
-                  </a:solidFill>
-                  <a:latin typeface="+mn-lt"/>
-                </a:defRPr>
-              </a:pPr>
-            </a:p>
-          </c:txPr>
           <c:showLegendKey val="0"/>
           <c:showVal val="1"/>
           <c:showCatName val="0"/>
           <c:showSerName val="0"/>
           <c:showPercent val="0"/>
           <c:showBubbleSize val="0"/>
-          <c:showLeaderLines val="0"/>
         </c:dLbls>
         <c:gapWidth val="45"/>
-        <c:overlap val="0"/>
         <c:axId val="2094734554"/>
         <c:axId val="2094734552"/>
-        <c:axId val="2094734556"/>
       </c:barChart>
       <c:catAx>
         <c:axId val="2094734554"/>
@@ -1273,6 +1455,7 @@
         <c:crosses val="autoZero"/>
         <c:auto val="1"/>
         <c:lblAlgn val="ctr"/>
+        <c:lblOffset val="100"/>
         <c:noMultiLvlLbl val="1"/>
       </c:catAx>
       <c:valAx>
@@ -1338,6 +1521,7 @@
     </c:plotArea>
     <c:plotVisOnly val="1"/>
     <c:dispBlanksAs val="span"/>
+    <c:showDLblsOverMax val="1"/>
   </c:chart>
   <c:spPr>
     <a:noFill/>
@@ -1374,234 +1558,10 @@
           <a:chExt cx="0" cy="0"/>
         </a:xfrm>
       </p:grpSpPr>
-      <p:sp>
-        <p:nvSpPr>
-          <p:cNvPr id="2" name="Header Placeholder 1"/>
-          <p:cNvSpPr>
-            <a:spLocks noGrp="1"/>
-          </p:cNvSpPr>
-          <p:nvPr>
-            <p:ph type="hdr" sz="quarter"/>
-          </p:nvPr>
-        </p:nvSpPr>
-        <p:spPr>
-          <a:xfrm>
-            <a:off x="0" y="0"/>
-            <a:ext cx="2971800" cy="458788"/>
-          </a:xfrm>
-          <a:prstGeom prst="rect">
-            <a:avLst/>
-          </a:prstGeom>
-        </p:spPr>
-        <p:txBody>
-          <a:bodyPr vert="horz" lIns="91440" tIns="45720" rIns="91440" bIns="45720" rtlCol="0"/>
-          <a:lstStyle>
-            <a:lvl1pPr algn="l">
-              <a:defRPr sz="1200"/>
-            </a:lvl1pPr>
-          </a:lstStyle>
-          <a:p>
-            <a:endParaRPr lang="en-US"/>
-          </a:p>
-        </p:txBody>
-      </p:sp>
-      <p:sp>
-        <p:nvSpPr>
-          <p:cNvPr id="3" name="Date Placeholder 2"/>
-          <p:cNvSpPr>
-            <a:spLocks noGrp="1"/>
-          </p:cNvSpPr>
-          <p:nvPr>
-            <p:ph type="dt" idx="1"/>
-          </p:nvPr>
-        </p:nvSpPr>
-        <p:spPr>
-          <a:xfrm>
-            <a:off x="3884613" y="0"/>
-            <a:ext cx="2971800" cy="458788"/>
-          </a:xfrm>
-          <a:prstGeom prst="rect">
-            <a:avLst/>
-          </a:prstGeom>
-        </p:spPr>
-        <p:txBody>
-          <a:bodyPr vert="horz" lIns="91440" tIns="45720" rIns="91440" bIns="45720" rtlCol="0"/>
-          <a:lstStyle>
-            <a:lvl1pPr algn="r">
-              <a:defRPr sz="1200"/>
-            </a:lvl1pPr>
-          </a:lstStyle>
-          <a:p>
-            <a:fld id="{5282F153-3F37-0F45-9E97-73ACFA13230C}" type="datetimeFigureOut">
-              <a:rPr lang="en-US"/>
-              <a:t>7/23/19</a:t>
-            </a:fld>
-            <a:endParaRPr lang="en-US"/>
-          </a:p>
-        </p:txBody>
-      </p:sp>
-      <p:sp>
-        <p:nvSpPr>
-          <p:cNvPr id="4" name="Slide Image Placeholder 3"/>
-          <p:cNvSpPr>
-            <a:spLocks noGrp="1" noRot="1" noChangeAspect="1"/>
-          </p:cNvSpPr>
-          <p:nvPr>
-            <p:ph type="sldImg" idx="2"/>
-          </p:nvPr>
-        </p:nvSpPr>
-        <p:spPr>
-          <a:xfrm>
-            <a:off x="685800" y="1143000"/>
-            <a:ext cx="5486400" cy="3086100"/>
-          </a:xfrm>
-          <a:prstGeom prst="rect">
-            <a:avLst/>
-          </a:prstGeom>
-          <a:noFill/>
-          <a:ln w="12700">
-            <a:solidFill>
-              <a:prstClr val="black"/>
-            </a:solidFill>
-          </a:ln>
-        </p:spPr>
-        <p:txBody>
-          <a:bodyPr vert="horz" lIns="91440" tIns="45720" rIns="91440" bIns="45720" rtlCol="0" anchor="ctr"/>
-          <a:lstStyle/>
-          <a:p>
-            <a:endParaRPr lang="en-US"/>
-          </a:p>
-        </p:txBody>
-      </p:sp>
-      <p:sp>
-        <p:nvSpPr>
-          <p:cNvPr id="5" name="Notes Placeholder 4"/>
-          <p:cNvSpPr>
-            <a:spLocks noGrp="1"/>
-          </p:cNvSpPr>
-          <p:nvPr>
-            <p:ph type="body" sz="quarter" idx="3"/>
-          </p:nvPr>
-        </p:nvSpPr>
-        <p:spPr>
-          <a:xfrm>
-            <a:off x="685800" y="4400550"/>
-            <a:ext cx="5486400" cy="3600450"/>
-          </a:xfrm>
-          <a:prstGeom prst="rect">
-            <a:avLst/>
-          </a:prstGeom>
-        </p:spPr>
-        <p:txBody>
-          <a:bodyPr vert="horz" lIns="91440" tIns="45720" rIns="91440" bIns="45720" rtlCol="0"/>
-          <a:lstStyle/>
-          <a:p>
-            <a:pPr lvl="0"/>
-            <a:r>
-              <a:rPr lang="en-US"/>
-              <a:t>Click to edit Master text styles</a:t>
-            </a:r>
-          </a:p>
-          <a:p>
-            <a:pPr lvl="1"/>
-            <a:r>
-              <a:rPr lang="en-US"/>
-              <a:t>Second level</a:t>
-            </a:r>
-          </a:p>
-          <a:p>
-            <a:pPr lvl="2"/>
-            <a:r>
-              <a:rPr lang="en-US"/>
-              <a:t>Third level</a:t>
-            </a:r>
-          </a:p>
-          <a:p>
-            <a:pPr lvl="3"/>
-            <a:r>
-              <a:rPr lang="en-US"/>
-              <a:t>Fourth level</a:t>
-            </a:r>
-          </a:p>
-          <a:p>
-            <a:pPr lvl="4"/>
-            <a:r>
-              <a:rPr lang="en-US"/>
-              <a:t>Fifth level</a:t>
-            </a:r>
-          </a:p>
-        </p:txBody>
-      </p:sp>
-      <p:sp>
-        <p:nvSpPr>
-          <p:cNvPr id="6" name="Footer Placeholder 5"/>
-          <p:cNvSpPr>
-            <a:spLocks noGrp="1"/>
-          </p:cNvSpPr>
-          <p:nvPr>
-            <p:ph type="ftr" sz="quarter" idx="4"/>
-          </p:nvPr>
-        </p:nvSpPr>
-        <p:spPr>
-          <a:xfrm>
-            <a:off x="0" y="8685213"/>
-            <a:ext cx="2971800" cy="458787"/>
-          </a:xfrm>
-          <a:prstGeom prst="rect">
-            <a:avLst/>
-          </a:prstGeom>
-        </p:spPr>
-        <p:txBody>
-          <a:bodyPr vert="horz" lIns="91440" tIns="45720" rIns="91440" bIns="45720" rtlCol="0" anchor="b"/>
-          <a:lstStyle>
-            <a:lvl1pPr algn="l">
-              <a:defRPr sz="1200"/>
-            </a:lvl1pPr>
-          </a:lstStyle>
-          <a:p>
-            <a:endParaRPr lang="en-US"/>
-          </a:p>
-        </p:txBody>
-      </p:sp>
-      <p:sp>
-        <p:nvSpPr>
-          <p:cNvPr id="7" name="Slide Number Placeholder 6"/>
-          <p:cNvSpPr>
-            <a:spLocks noGrp="1"/>
-          </p:cNvSpPr>
-          <p:nvPr>
-            <p:ph type="sldNum" sz="quarter" idx="5"/>
-          </p:nvPr>
-        </p:nvSpPr>
-        <p:spPr>
-          <a:xfrm>
-            <a:off x="3884613" y="8685213"/>
-            <a:ext cx="2971800" cy="458787"/>
-          </a:xfrm>
-          <a:prstGeom prst="rect">
-            <a:avLst/>
-          </a:prstGeom>
-        </p:spPr>
-        <p:txBody>
-          <a:bodyPr vert="horz" lIns="91440" tIns="45720" rIns="91440" bIns="45720" rtlCol="0" anchor="b"/>
-          <a:lstStyle>
-            <a:lvl1pPr algn="r">
-              <a:defRPr sz="1200"/>
-            </a:lvl1pPr>
-          </a:lstStyle>
-          <a:p>
-            <a:fld id="{CE5E9CC1-C706-0F49-92D6-E571CC5EEA8F}" type="slidenum">
-              <a:rPr lang="en-US"/>
-              <a:t>‹#›</a:t>
-            </a:fld>
-            <a:endParaRPr lang="en-US"/>
-          </a:p>
-        </p:txBody>
-      </p:sp>
     </p:spTree>
     <p:extLst>
       <p:ext uri="{BB962C8B-B14F-4D97-AF65-F5344CB8AC3E}">
-        <p14:creationId xmlns:p14="http://schemas.microsoft.com/office/powerpoint/2010/main" val="1024086991"/>
+        <p14:creationId xmlns:p14="http://schemas.microsoft.com/office/powerpoint/2010/main" val="42236551"/>
       </p:ext>
     </p:extLst>
   </p:cSld>
@@ -1749,7 +1709,6 @@
               <a:rPr lang="en-US" dirty="0"/>
               <a:t>Presenter: Pooja (Product Lead). Introduce the team and the project: we built a customer-support chatbot with something worth stealing, attacked it, defended it, and measured both attack success and the cost to real customers.</a:t>
             </a:r>
-            <a:endParaRPr lang="en-US" dirty="0"/>
           </a:p>
         </p:txBody>
       </p:sp>
@@ -1837,7 +1796,6 @@
               <a:rPr lang="en-US" dirty="0"/>
               <a:t>Presenter: Surya. Two further limits: the judge is itself an LLM (a multi-turn attack and a synonym attack passed it when it ran alone), and each case ran once at temperature 0.3.</a:t>
             </a:r>
-            <a:endParaRPr lang="en-US" dirty="0"/>
           </a:p>
         </p:txBody>
       </p:sp>
@@ -1925,7 +1883,6 @@
               <a:rPr lang="en-US" dirty="0"/>
               <a:t>Presenter: Hetal (Ethics &amp; Risk Lead). Emphasise that a defense is not free: every false positive is a real customer turned away. Cost figure is approximate, at gpt-4o-mini list prices for about 204k tokens.</a:t>
             </a:r>
-            <a:endParaRPr lang="en-US" dirty="0"/>
           </a:p>
         </p:txBody>
       </p:sp>
@@ -2013,7 +1970,6 @@
               <a:rPr lang="en-US" dirty="0"/>
               <a:t>Presenter: Harshita. Close on the main lesson: layered defenses work, but the cheap layer that looked best on our own tests was the one that generalised worst, and every defense has a cost in refused customers.</a:t>
             </a:r>
-            <a:endParaRPr lang="en-US" dirty="0"/>
           </a:p>
         </p:txBody>
       </p:sp>
@@ -2101,7 +2057,6 @@
               <a:rPr lang="en-US" dirty="0"/>
               <a:t>Presenter: Pooja. Direct injection is the obvious case. Indirect injection is the dangerous one, because the attacker never talks to the bot; they poison the data it reads (Greshake et al., 2023). Over-blocking is also a harm, which is why every attack number in this deck sits next to a false-positive number.</a:t>
             </a:r>
-            <a:endParaRPr lang="en-US" dirty="0"/>
           </a:p>
         </p:txBody>
       </p:sp>
@@ -2189,7 +2144,6 @@
               <a:rPr lang="en-US" dirty="0"/>
               <a:t>Presenter: Pooja. The professor asked for an app with something worth protecting. We have four assets, and each attack has one goal, scored automatically by a detector for that goal. All assets are fictional; .example domains cannot resolve.</a:t>
             </a:r>
-            <a:endParaRPr lang="en-US" dirty="0"/>
           </a:p>
         </p:txBody>
       </p:sp>
@@ -2277,7 +2231,6 @@
               <a:rPr lang="en-US" dirty="0"/>
               <a:t>Presenter: Harshita (Model/Prompt Engineer). Walk left to right. L1 is cheap regex after cleaning look-alike letters, invisible characters and base64. L2 is a second gpt-4o-mini call that only classifies; it fails closed. L3 is the real fix: the secret is simply not in the protected prompt, and retrieved text is wrapped in &lt;untrusted_document&gt; tags with an explicit instruction hierarchy (Wallace et al., 2024; Hines et al., 2024). L4 scans the reply with the same detectors used for scoring. Each layer is a switch, which is what makes the ablation possible.</a:t>
             </a:r>
-            <a:endParaRPr lang="en-US" dirty="0"/>
           </a:p>
         </p:txBody>
       </p:sp>
@@ -2365,7 +2318,6 @@
               <a:rPr lang="en-US" dirty="0"/>
               <a:t>Presenter: Harshita (live). Use the poisoned product page first: it succeeded 4 of 4 times at baseline in the evaluation, so it is the most reliable live attack. The model runs at temperature 0.3, so a direct attack may or may not leak on a given try; say so if it does not. Switch to Protected and point at the trace panel.</a:t>
             </a:r>
-            <a:endParaRPr lang="en-US" dirty="0"/>
           </a:p>
         </p:txBody>
       </p:sp>
@@ -2453,7 +2405,6 @@
               <a:rPr lang="en-US" dirty="0"/>
               <a:t>Presenter: Surya (Evaluation Lead). The held-out set is the key methodological choice: the filter rules were written while looking at the main library, so testing only on it would overstate protection. Hard negatives measure over-blocking. Multi-turn attacks are real sequential conversations in every configuration, and uploaded documents go through the upload path. Model: gpt-4o-mini for both bot and judge; one run per case; run date 24 Oct 2026.</a:t>
             </a:r>
-            <a:endParaRPr lang="en-US" dirty="0"/>
           </a:p>
         </p:txBody>
       </p:sp>
@@ -2541,7 +2492,6 @@
               <a:rPr lang="en-US" dirty="0"/>
               <a:t>Presenter: Surya. Baseline: 8/40 main and 8/12 held-out attacks succeeded. Full stack: 0/40 and 0/12. The price: 3 of 35 legitimate questions were refused, all of them hard negatives (0 of 25 simple questions). Helpfulness fell from 100% to 91.4%. Mean latency per message: 838 ms baseline vs 751 ms full, because blocked messages skip the main model call.</a:t>
             </a:r>
-            <a:endParaRPr lang="en-US" dirty="0"/>
           </a:p>
         </p:txBody>
       </p:sp>
@@ -2629,7 +2579,6 @@
               <a:rPr lang="en-US" dirty="0"/>
               <a:t>Presenter: Surya. Read the red bars: held-out attack success. The input filter looks excellent on the main set and fails on attacks it has never seen, which is the classic overfitting pattern. The output filter's 0% is partly circular because it uses the same detectors as the grader (next slides). Not yet measured: privilege separation + judge + output filter without the regex filter, which may match the full stack with no false positives.</a:t>
             </a:r>
-            <a:endParaRPr lang="en-US" dirty="0"/>
           </a:p>
         </p:txBody>
       </p:sp>
@@ -2717,7 +2666,6 @@
               <a:rPr lang="en-US" dirty="0"/>
               <a:t>Presenter: Surya. This is the baseline, no defenses. gpt-4o-mini resists blunt requests and role-play, but treats retrieved text as trustworthy. That matches the indirect prompt injection literature: the more an application reads from outside sources, the larger its attack surface.</a:t>
             </a:r>
-            <a:endParaRPr lang="en-US" dirty="0"/>
           </a:p>
         </p:txBody>
       </p:sp>
@@ -2795,6 +2743,7 @@
         <a:solidFill>
           <a:schemeClr val="tx2"/>
         </a:solidFill>
+        <a:effectLst/>
       </p:bgPr>
     </p:bg>
     <p:spTree>
@@ -2814,9 +2763,11 @@
       <p:sp>
         <p:nvSpPr>
           <p:cNvPr id="2" name="Text 0"/>
-          <p:cNvSpPr/>
+          <p:cNvSpPr>
+            <a:spLocks noGrp="1"/>
+          </p:cNvSpPr>
           <p:nvPr>
-            <p:ph idx="100" type="title" hasCustomPrompt="1"/>
+            <p:ph type="title" idx="100" hasCustomPrompt="1"/>
           </p:nvPr>
         </p:nvSpPr>
         <p:spPr>
@@ -2833,7 +2784,7 @@
         <p:txBody>
           <a:bodyPr wrap="square" rtlCol="0"/>
           <a:lstStyle>
-            <a:lvl1pPr algn="l" indent="0" marL="0">
+            <a:lvl1pPr marL="0" indent="0" algn="l">
               <a:buNone/>
               <a:defRPr lang="en-US" sz="5400" b="1" dirty="0">
                 <a:solidFill>
@@ -2843,7 +2794,7 @@
             </a:lvl1pPr>
           </a:lstStyle>
           <a:p>
-            <a:pPr algn="l" indent="0" marL="0">
+            <a:pPr marL="0" indent="0" algn="l">
               <a:buNone/>
             </a:pPr>
             <a:endParaRPr lang="en-US" sz="5400" dirty="0"/>
@@ -2853,9 +2804,11 @@
       <p:sp>
         <p:nvSpPr>
           <p:cNvPr id="3" name="Text 0"/>
-          <p:cNvSpPr/>
+          <p:cNvSpPr>
+            <a:spLocks noGrp="1"/>
+          </p:cNvSpPr>
           <p:nvPr>
-            <p:ph idx="101" type="body" hasCustomPrompt="1"/>
+            <p:ph type="body" idx="101" hasCustomPrompt="1"/>
           </p:nvPr>
         </p:nvSpPr>
         <p:spPr>
@@ -2872,7 +2825,7 @@
         <p:txBody>
           <a:bodyPr wrap="square" rtlCol="0"/>
           <a:lstStyle>
-            <a:lvl1pPr indent="0" marL="0">
+            <a:lvl1pPr marL="0" indent="0">
               <a:buNone/>
               <a:defRPr lang="en-US" sz="2200" dirty="0">
                 <a:solidFill>
@@ -2882,7 +2835,7 @@
             </a:lvl1pPr>
           </a:lstStyle>
           <a:p>
-            <a:pPr indent="0" marL="0">
+            <a:pPr marL="0" indent="0">
               <a:buNone/>
             </a:pPr>
             <a:endParaRPr lang="en-US" sz="2200" dirty="0"/>
@@ -2905,6 +2858,7 @@
         <a:solidFill>
           <a:schemeClr val="bg1"/>
         </a:solidFill>
+        <a:effectLst/>
       </p:bgPr>
     </p:bg>
     <p:spTree>
@@ -2924,9 +2878,11 @@
       <p:sp>
         <p:nvSpPr>
           <p:cNvPr id="2" name="Text 0"/>
-          <p:cNvSpPr/>
+          <p:cNvSpPr>
+            <a:spLocks noGrp="1"/>
+          </p:cNvSpPr>
           <p:nvPr>
-            <p:ph idx="100" type="title" hasCustomPrompt="1"/>
+            <p:ph type="title" idx="100" hasCustomPrompt="1"/>
           </p:nvPr>
         </p:nvSpPr>
         <p:spPr>
@@ -2943,7 +2899,7 @@
         <p:txBody>
           <a:bodyPr wrap="square" rtlCol="0"/>
           <a:lstStyle>
-            <a:lvl1pPr algn="l" indent="0" marL="0">
+            <a:lvl1pPr marL="0" indent="0" algn="l">
               <a:buNone/>
               <a:defRPr lang="en-US" sz="3400" b="1" dirty="0">
                 <a:solidFill>
@@ -2953,7 +2909,7 @@
             </a:lvl1pPr>
           </a:lstStyle>
           <a:p>
-            <a:pPr algn="l" indent="0" marL="0">
+            <a:pPr marL="0" indent="0" algn="l">
               <a:buNone/>
             </a:pPr>
             <a:endParaRPr lang="en-US" sz="3400" dirty="0"/>
@@ -2981,7 +2937,7 @@
           <a:bodyPr wrap="square" lIns="0" tIns="0" rIns="0" bIns="0" rtlCol="0" anchor="ctr"/>
           <a:lstStyle/>
           <a:p>
-            <a:pPr indent="0" marL="0">
+            <a:pPr marL="0" indent="0">
               <a:buNone/>
             </a:pPr>
             <a:r>
@@ -3016,7 +2972,7 @@
           </a:prstGeom>
           <a:extLst>
             <a:ext uri="{C572A759-6A51-4108-AA02-DFA0A04FC94B}">
-              <ma14:wrappingTextBoxFlag xmlns:ma14="http://schemas.microsoft.com/office/mac/drawingml/2011/main" val="0"/>
+              <ma14:wrappingTextBoxFlag xmlns:ma14="http://schemas.microsoft.com/office/mac/drawingml/2011/main" xmlns="" val="0"/>
             </a:ext>
           </a:extLst>
         </p:spPr>
@@ -3034,8 +2990,8 @@
           <a:p>
             <a:pPr algn="r"/>
             <a:fld id="{F7021451-1387-4CA6-816F-3879F97B5CBC}" type="slidenum">
-              <a:rPr b="0" lang="en-US"/>
-              <a:t>1003</a:t>
+              <a:rPr lang="en-US" b="0"/>
+              <a:t>‹#›</a:t>
             </a:fld>
             <a:endParaRPr lang="en-US"/>
           </a:p>
@@ -3057,6 +3013,7 @@
         <a:solidFill>
           <a:schemeClr val="tx2"/>
         </a:solidFill>
+        <a:effectLst/>
       </p:bgPr>
     </p:bg>
     <p:spTree>
@@ -3076,9 +3033,11 @@
       <p:sp>
         <p:nvSpPr>
           <p:cNvPr id="2" name="Text 0"/>
-          <p:cNvSpPr/>
+          <p:cNvSpPr>
+            <a:spLocks noGrp="1"/>
+          </p:cNvSpPr>
           <p:nvPr>
-            <p:ph idx="100" type="title" hasCustomPrompt="1"/>
+            <p:ph type="title" idx="100" hasCustomPrompt="1"/>
           </p:nvPr>
         </p:nvSpPr>
         <p:spPr>
@@ -3095,7 +3054,7 @@
         <p:txBody>
           <a:bodyPr wrap="square" rtlCol="0"/>
           <a:lstStyle>
-            <a:lvl1pPr algn="l" indent="0" marL="0">
+            <a:lvl1pPr marL="0" indent="0" algn="l">
               <a:buNone/>
               <a:defRPr lang="en-US" sz="3400" b="1" dirty="0">
                 <a:solidFill>
@@ -3105,7 +3064,7 @@
             </a:lvl1pPr>
           </a:lstStyle>
           <a:p>
-            <a:pPr algn="l" indent="0" marL="0">
+            <a:pPr marL="0" indent="0" algn="l">
               <a:buNone/>
             </a:pPr>
             <a:endParaRPr lang="en-US" sz="3400" dirty="0"/>
@@ -3132,7 +3091,7 @@
           </a:prstGeom>
           <a:extLst>
             <a:ext uri="{C572A759-6A51-4108-AA02-DFA0A04FC94B}">
-              <ma14:wrappingTextBoxFlag xmlns:ma14="http://schemas.microsoft.com/office/mac/drawingml/2011/main" val="0"/>
+              <ma14:wrappingTextBoxFlag xmlns:ma14="http://schemas.microsoft.com/office/mac/drawingml/2011/main" xmlns="" val="0"/>
             </a:ext>
           </a:extLst>
         </p:spPr>
@@ -3150,8 +3109,8 @@
           <a:p>
             <a:pPr algn="r"/>
             <a:fld id="{F7021451-1387-4CA6-816F-3879F97B5CBC}" type="slidenum">
-              <a:rPr b="0" lang="en-US"/>
-              <a:t>1004</a:t>
+              <a:rPr lang="en-US" b="0"/>
+              <a:t>‹#›</a:t>
             </a:fld>
             <a:endParaRPr lang="en-US"/>
           </a:p>
@@ -3168,6 +3127,11 @@
 <file path=ppt/slideMasters/slideMaster1.xml><?xml version="1.0" encoding="utf-8"?>
 <p:sldMaster xmlns:a="http://schemas.openxmlformats.org/drawingml/2006/main" xmlns:r="http://schemas.openxmlformats.org/officeDocument/2006/relationships" xmlns:p="http://schemas.openxmlformats.org/presentationml/2006/main">
   <p:cSld>
+    <p:bg>
+      <p:bgRef idx="1001">
+        <a:schemeClr val="bg1"/>
+      </p:bgRef>
+    </p:bg>
     <p:spTree>
       <p:nvGrpSpPr>
         <p:cNvPr id="1" name=""/>
@@ -3202,7 +3166,7 @@
           </a:prstGeom>
           <a:extLst>
             <a:ext uri="{C572A759-6A51-4108-AA02-DFA0A04FC94B}">
-              <ma14:wrappingTextBoxFlag xmlns:ma14="http://schemas.microsoft.com/office/mac/drawingml/2011/main" val="0"/>
+              <ma14:wrappingTextBoxFlag xmlns:ma14="http://schemas.microsoft.com/office/mac/drawingml/2011/main" xmlns="" val="0"/>
             </a:ext>
           </a:extLst>
         </p:spPr>
@@ -3220,8 +3184,8 @@
           <a:p>
             <a:pPr algn="r"/>
             <a:fld id="{F7021451-1387-4CA6-816F-3879F97B5CBC}" type="slidenum">
-              <a:rPr b="0" lang="en-US"/>
-              <a:t>null</a:t>
+              <a:rPr lang="en-US" b="0"/>
+              <a:t>‹#›</a:t>
             </a:fld>
             <a:endParaRPr lang="en-US"/>
           </a:p>
@@ -3510,9 +3474,11 @@
       <p:sp>
         <p:nvSpPr>
           <p:cNvPr id="2" name="Text 0"/>
-          <p:cNvSpPr/>
+          <p:cNvSpPr>
+            <a:spLocks noGrp="1"/>
+          </p:cNvSpPr>
           <p:nvPr>
-            <p:ph idx="100" type="title" hasCustomPrompt="1"/>
+            <p:ph type="title" idx="100" hasCustomPrompt="1"/>
           </p:nvPr>
         </p:nvSpPr>
         <p:spPr>
@@ -3530,7 +3496,7 @@
           <a:bodyPr wrap="square" lIns="0" tIns="0" rIns="0" bIns="0" rtlCol="0" anchor="b"/>
           <a:lstStyle/>
           <a:p>
-            <a:pPr algn="l" indent="0" marL="0">
+            <a:pPr marL="0" indent="0" algn="l">
               <a:buNone/>
             </a:pPr>
             <a:r>
@@ -3548,9 +3514,11 @@
       <p:sp>
         <p:nvSpPr>
           <p:cNvPr id="3" name="Text 0"/>
-          <p:cNvSpPr/>
+          <p:cNvSpPr>
+            <a:spLocks noGrp="1"/>
+          </p:cNvSpPr>
           <p:nvPr>
-            <p:ph idx="101" type="body" hasCustomPrompt="1"/>
+            <p:ph type="body" idx="101" hasCustomPrompt="1"/>
           </p:nvPr>
         </p:nvSpPr>
         <p:spPr>
@@ -3568,7 +3536,7 @@
           <a:bodyPr wrap="square" lIns="0" tIns="0" rIns="0" bIns="0" rtlCol="0" anchor="t"/>
           <a:lstStyle/>
           <a:p>
-            <a:pPr indent="0" marL="0">
+            <a:pPr marL="0" indent="0">
               <a:buNone/>
             </a:pPr>
             <a:r>
@@ -3607,17 +3575,24 @@
             <a:prstDash val="solid"/>
           </a:ln>
         </p:spPr>
+        <p:txBody>
+          <a:bodyPr/>
+          <a:lstStyle/>
+          <a:p>
+            <a:endParaRPr lang="en-US"/>
+          </a:p>
+        </p:txBody>
       </p:sp>
       <p:pic>
         <p:nvPicPr>
-          <p:cNvPr id="5" name="Image 0" descr="preencoded.png">    </p:cNvPr>
+          <p:cNvPr id="5" name="Image 0" descr="preencoded.png"/>
           <p:cNvPicPr>
             <a:picLocks noChangeAspect="1"/>
           </p:cNvPicPr>
           <p:nvPr/>
         </p:nvPicPr>
         <p:blipFill>
-          <a:blip r:embed="rId1"/>
+          <a:blip r:embed="rId3"/>
           <a:stretch>
             <a:fillRect/>
           </a:stretch>
@@ -3653,7 +3628,7 @@
           <a:bodyPr wrap="square" lIns="0" tIns="0" rIns="0" bIns="0" rtlCol="0" anchor="t"/>
           <a:lstStyle/>
           <a:p>
-            <a:pPr indent="0" marL="0">
+            <a:pPr marL="0" indent="0">
               <a:buNone/>
             </a:pPr>
             <a:r>
@@ -3689,7 +3664,7 @@
           <a:bodyPr wrap="square" lIns="0" tIns="0" rIns="0" bIns="0" rtlCol="0" anchor="t"/>
           <a:lstStyle/>
           <a:p>
-            <a:pPr indent="0" marL="0">
+            <a:pPr marL="0" indent="0">
               <a:buNone/>
             </a:pPr>
             <a:r>
@@ -3703,7 +3678,7 @@
             <a:endParaRPr lang="en-US" sz="1400" dirty="0"/>
           </a:p>
           <a:p>
-            <a:pPr indent="0" marL="0">
+            <a:pPr marL="0" indent="0">
               <a:buNone/>
             </a:pPr>
             <a:r>
@@ -3739,7 +3714,7 @@
           <a:bodyPr wrap="square" lIns="0" tIns="0" rIns="0" bIns="0" rtlCol="0" anchor="t"/>
           <a:lstStyle/>
           <a:p>
-            <a:pPr indent="0" marL="0">
+            <a:pPr marL="0" indent="0">
               <a:buNone/>
             </a:pPr>
             <a:r>
@@ -3753,7 +3728,7 @@
             <a:endParaRPr lang="en-US" sz="1400" dirty="0"/>
           </a:p>
           <a:p>
-            <a:pPr indent="0" marL="0">
+            <a:pPr marL="0" indent="0">
               <a:buNone/>
             </a:pPr>
             <a:r>
@@ -3789,7 +3764,7 @@
           <a:bodyPr wrap="square" lIns="0" tIns="0" rIns="0" bIns="0" rtlCol="0" anchor="t"/>
           <a:lstStyle/>
           <a:p>
-            <a:pPr indent="0" marL="0">
+            <a:pPr marL="0" indent="0">
               <a:buNone/>
             </a:pPr>
             <a:r>
@@ -3803,7 +3778,7 @@
             <a:endParaRPr lang="en-US" sz="1400" dirty="0"/>
           </a:p>
           <a:p>
-            <a:pPr indent="0" marL="0">
+            <a:pPr marL="0" indent="0">
               <a:buNone/>
             </a:pPr>
             <a:r>
@@ -3839,7 +3814,7 @@
           <a:bodyPr wrap="square" lIns="0" tIns="0" rIns="0" bIns="0" rtlCol="0" anchor="t"/>
           <a:lstStyle/>
           <a:p>
-            <a:pPr indent="0" marL="0">
+            <a:pPr marL="0" indent="0">
               <a:buNone/>
             </a:pPr>
             <a:r>
@@ -3853,7 +3828,7 @@
             <a:endParaRPr lang="en-US" sz="1400" dirty="0"/>
           </a:p>
           <a:p>
-            <a:pPr indent="0" marL="0">
+            <a:pPr marL="0" indent="0">
               <a:buNone/>
             </a:pPr>
             <a:r>
@@ -3889,7 +3864,7 @@
           <a:bodyPr wrap="square" lIns="0" tIns="0" rIns="0" bIns="0" rtlCol="0" anchor="t"/>
           <a:lstStyle/>
           <a:p>
-            <a:pPr indent="0" marL="0">
+            <a:pPr marL="0" indent="0">
               <a:buNone/>
             </a:pPr>
             <a:r>
@@ -3903,7 +3878,7 @@
             <a:endParaRPr lang="en-US" sz="1400" dirty="0"/>
           </a:p>
           <a:p>
-            <a:pPr indent="0" marL="0">
+            <a:pPr marL="0" indent="0">
               <a:buNone/>
             </a:pPr>
             <a:r>
@@ -3946,9 +3921,11 @@
       <p:sp>
         <p:nvSpPr>
           <p:cNvPr id="2" name="Text 0"/>
-          <p:cNvSpPr/>
+          <p:cNvSpPr>
+            <a:spLocks noGrp="1"/>
+          </p:cNvSpPr>
           <p:nvPr>
-            <p:ph idx="100" type="title" hasCustomPrompt="1"/>
+            <p:ph type="title" idx="100" hasCustomPrompt="1"/>
           </p:nvPr>
         </p:nvSpPr>
         <p:spPr>
@@ -3966,7 +3943,7 @@
           <a:bodyPr wrap="square" lIns="0" tIns="0" rIns="0" bIns="0" rtlCol="0" anchor="ctr"/>
           <a:lstStyle/>
           <a:p>
-            <a:pPr algn="l" indent="0" marL="0">
+            <a:pPr marL="0" indent="0" algn="l">
               <a:buNone/>
             </a:pPr>
             <a:r>
@@ -4007,6 +3984,13 @@
             <a:prstDash val="solid"/>
           </a:ln>
         </p:spPr>
+        <p:txBody>
+          <a:bodyPr/>
+          <a:lstStyle/>
+          <a:p>
+            <a:endParaRPr lang="en-US"/>
+          </a:p>
+        </p:txBody>
       </p:sp>
       <p:sp>
         <p:nvSpPr>
@@ -4032,17 +4016,24 @@
             <a:prstDash val="solid"/>
           </a:ln>
         </p:spPr>
+        <p:txBody>
+          <a:bodyPr/>
+          <a:lstStyle/>
+          <a:p>
+            <a:endParaRPr lang="en-US"/>
+          </a:p>
+        </p:txBody>
       </p:sp>
       <p:pic>
         <p:nvPicPr>
-          <p:cNvPr id="5" name="Image 0" descr="preencoded.png">    </p:cNvPr>
+          <p:cNvPr id="5" name="Image 0" descr="preencoded.png"/>
           <p:cNvPicPr>
             <a:picLocks noChangeAspect="1"/>
           </p:cNvPicPr>
           <p:nvPr/>
         </p:nvPicPr>
         <p:blipFill>
-          <a:blip r:embed="rId1"/>
+          <a:blip r:embed="rId3"/>
           <a:stretch>
             <a:fillRect/>
           </a:stretch>
@@ -4078,7 +4069,7 @@
           <a:bodyPr wrap="square" lIns="0" tIns="0" rIns="0" bIns="0" rtlCol="0" anchor="t"/>
           <a:lstStyle/>
           <a:p>
-            <a:pPr indent="0" marL="0">
+            <a:pPr marL="0" indent="0">
               <a:buNone/>
             </a:pPr>
             <a:r>
@@ -4114,7 +4105,7 @@
           <a:bodyPr wrap="square" lIns="0" tIns="0" rIns="0" bIns="0" rtlCol="0" anchor="t"/>
           <a:lstStyle/>
           <a:p>
-            <a:pPr indent="0" marL="0">
+            <a:pPr marL="0" indent="0">
               <a:buNone/>
             </a:pPr>
             <a:r>
@@ -4155,6 +4146,13 @@
             <a:prstDash val="solid"/>
           </a:ln>
         </p:spPr>
+        <p:txBody>
+          <a:bodyPr/>
+          <a:lstStyle/>
+          <a:p>
+            <a:endParaRPr lang="en-US"/>
+          </a:p>
+        </p:txBody>
       </p:sp>
       <p:sp>
         <p:nvSpPr>
@@ -4180,17 +4178,24 @@
             <a:prstDash val="solid"/>
           </a:ln>
         </p:spPr>
+        <p:txBody>
+          <a:bodyPr/>
+          <a:lstStyle/>
+          <a:p>
+            <a:endParaRPr lang="en-US"/>
+          </a:p>
+        </p:txBody>
       </p:sp>
       <p:pic>
         <p:nvPicPr>
-          <p:cNvPr id="10" name="Image 1" descr="preencoded.png">    </p:cNvPr>
+          <p:cNvPr id="10" name="Image 1" descr="preencoded.png"/>
           <p:cNvPicPr>
             <a:picLocks noChangeAspect="1"/>
           </p:cNvPicPr>
           <p:nvPr/>
         </p:nvPicPr>
         <p:blipFill>
-          <a:blip r:embed="rId2"/>
+          <a:blip r:embed="rId4"/>
           <a:stretch>
             <a:fillRect/>
           </a:stretch>
@@ -4226,7 +4231,7 @@
           <a:bodyPr wrap="square" lIns="0" tIns="0" rIns="0" bIns="0" rtlCol="0" anchor="t"/>
           <a:lstStyle/>
           <a:p>
-            <a:pPr indent="0" marL="0">
+            <a:pPr marL="0" indent="0">
               <a:buNone/>
             </a:pPr>
             <a:r>
@@ -4262,7 +4267,7 @@
           <a:bodyPr wrap="square" lIns="0" tIns="0" rIns="0" bIns="0" rtlCol="0" anchor="t"/>
           <a:lstStyle/>
           <a:p>
-            <a:pPr indent="0" marL="0">
+            <a:pPr marL="0" indent="0">
               <a:buNone/>
             </a:pPr>
             <a:r>
@@ -4303,6 +4308,13 @@
             <a:prstDash val="solid"/>
           </a:ln>
         </p:spPr>
+        <p:txBody>
+          <a:bodyPr/>
+          <a:lstStyle/>
+          <a:p>
+            <a:endParaRPr lang="en-US"/>
+          </a:p>
+        </p:txBody>
       </p:sp>
       <p:sp>
         <p:nvSpPr>
@@ -4328,17 +4340,24 @@
             <a:prstDash val="solid"/>
           </a:ln>
         </p:spPr>
+        <p:txBody>
+          <a:bodyPr/>
+          <a:lstStyle/>
+          <a:p>
+            <a:endParaRPr lang="en-US"/>
+          </a:p>
+        </p:txBody>
       </p:sp>
       <p:pic>
         <p:nvPicPr>
-          <p:cNvPr id="15" name="Image 2" descr="preencoded.png">    </p:cNvPr>
+          <p:cNvPr id="15" name="Image 2" descr="preencoded.png"/>
           <p:cNvPicPr>
             <a:picLocks noChangeAspect="1"/>
           </p:cNvPicPr>
           <p:nvPr/>
         </p:nvPicPr>
         <p:blipFill>
-          <a:blip r:embed="rId3"/>
+          <a:blip r:embed="rId5"/>
           <a:stretch>
             <a:fillRect/>
           </a:stretch>
@@ -4374,7 +4393,7 @@
           <a:bodyPr wrap="square" lIns="0" tIns="0" rIns="0" bIns="0" rtlCol="0" anchor="t"/>
           <a:lstStyle/>
           <a:p>
-            <a:pPr indent="0" marL="0">
+            <a:pPr marL="0" indent="0">
               <a:buNone/>
             </a:pPr>
             <a:r>
@@ -4410,7 +4429,7 @@
           <a:bodyPr wrap="square" lIns="0" tIns="0" rIns="0" bIns="0" rtlCol="0" anchor="t"/>
           <a:lstStyle/>
           <a:p>
-            <a:pPr indent="0" marL="0">
+            <a:pPr marL="0" indent="0">
               <a:buNone/>
             </a:pPr>
             <a:r>
@@ -4451,6 +4470,13 @@
             <a:prstDash val="solid"/>
           </a:ln>
         </p:spPr>
+        <p:txBody>
+          <a:bodyPr/>
+          <a:lstStyle/>
+          <a:p>
+            <a:endParaRPr lang="en-US"/>
+          </a:p>
+        </p:txBody>
       </p:sp>
       <p:sp>
         <p:nvSpPr>
@@ -4476,17 +4502,24 @@
             <a:prstDash val="solid"/>
           </a:ln>
         </p:spPr>
+        <p:txBody>
+          <a:bodyPr/>
+          <a:lstStyle/>
+          <a:p>
+            <a:endParaRPr lang="en-US"/>
+          </a:p>
+        </p:txBody>
       </p:sp>
       <p:pic>
         <p:nvPicPr>
-          <p:cNvPr id="20" name="Image 3" descr="preencoded.png">    </p:cNvPr>
+          <p:cNvPr id="20" name="Image 3" descr="preencoded.png"/>
           <p:cNvPicPr>
             <a:picLocks noChangeAspect="1"/>
           </p:cNvPicPr>
           <p:nvPr/>
         </p:nvPicPr>
         <p:blipFill>
-          <a:blip r:embed="rId4"/>
+          <a:blip r:embed="rId6"/>
           <a:stretch>
             <a:fillRect/>
           </a:stretch>
@@ -4522,7 +4555,7 @@
           <a:bodyPr wrap="square" lIns="0" tIns="0" rIns="0" bIns="0" rtlCol="0" anchor="t"/>
           <a:lstStyle/>
           <a:p>
-            <a:pPr indent="0" marL="0">
+            <a:pPr marL="0" indent="0">
               <a:buNone/>
             </a:pPr>
             <a:r>
@@ -4558,7 +4591,7 @@
           <a:bodyPr wrap="square" lIns="0" tIns="0" rIns="0" bIns="0" rtlCol="0" anchor="t"/>
           <a:lstStyle/>
           <a:p>
-            <a:pPr indent="0" marL="0">
+            <a:pPr marL="0" indent="0">
               <a:buNone/>
             </a:pPr>
             <a:r>
@@ -4599,6 +4632,13 @@
             <a:prstDash val="solid"/>
           </a:ln>
         </p:spPr>
+        <p:txBody>
+          <a:bodyPr/>
+          <a:lstStyle/>
+          <a:p>
+            <a:endParaRPr lang="en-US"/>
+          </a:p>
+        </p:txBody>
       </p:sp>
       <p:sp>
         <p:nvSpPr>
@@ -4621,7 +4661,7 @@
           <a:bodyPr wrap="square" lIns="0" tIns="0" rIns="0" bIns="0" rtlCol="0" anchor="ctr"/>
           <a:lstStyle/>
           <a:p>
-            <a:pPr indent="0" marL="0">
+            <a:pPr marL="0" indent="0">
               <a:buNone/>
             </a:pPr>
             <a:r>
@@ -4632,9 +4672,6 @@
               </a:rPr>
               <a:t>Bottom line. </a:t>
             </a:r>
-            <a:pPr indent="0" marL="0">
-              <a:buNone/>
-            </a:pPr>
             <a:r>
               <a:rPr lang="en-US" sz="1400" dirty="0">
                 <a:solidFill>
@@ -4667,7 +4704,7 @@
           </a:prstGeom>
           <a:extLst>
             <a:ext uri="{C572A759-6A51-4108-AA02-DFA0A04FC94B}">
-              <ma14:wrappingTextBoxFlag xmlns:ma14="http://schemas.microsoft.com/office/mac/drawingml/2011/main" val="0"/>
+              <ma14:wrappingTextBoxFlag xmlns:ma14="http://schemas.microsoft.com/office/mac/drawingml/2011/main" xmlns="" val="0"/>
             </a:ext>
           </a:extLst>
         </p:spPr>
@@ -4685,7 +4722,7 @@
           <a:p>
             <a:pPr algn="r"/>
             <a:fld id="{F7021451-1387-4CA6-816F-3879F97B5CBC}" type="slidenum">
-              <a:rPr b="0" lang="en-US"/>
+              <a:rPr lang="en-US" b="0"/>
               <a:t>10</a:t>
             </a:fld>
             <a:endParaRPr lang="en-US"/>
@@ -4720,9 +4757,11 @@
       <p:sp>
         <p:nvSpPr>
           <p:cNvPr id="2" name="Text 0"/>
-          <p:cNvSpPr/>
+          <p:cNvSpPr>
+            <a:spLocks noGrp="1"/>
+          </p:cNvSpPr>
           <p:nvPr>
-            <p:ph idx="100" type="title" hasCustomPrompt="1"/>
+            <p:ph type="title" idx="100" hasCustomPrompt="1"/>
           </p:nvPr>
         </p:nvSpPr>
         <p:spPr>
@@ -4740,7 +4779,7 @@
           <a:bodyPr wrap="square" lIns="0" tIns="0" rIns="0" bIns="0" rtlCol="0" anchor="ctr"/>
           <a:lstStyle/>
           <a:p>
-            <a:pPr algn="l" indent="0" marL="0">
+            <a:pPr marL="0" indent="0" algn="l">
               <a:buNone/>
             </a:pPr>
             <a:r>
@@ -4779,17 +4818,24 @@
             <a:prstDash val="solid"/>
           </a:ln>
         </p:spPr>
+        <p:txBody>
+          <a:bodyPr/>
+          <a:lstStyle/>
+          <a:p>
+            <a:endParaRPr lang="en-US"/>
+          </a:p>
+        </p:txBody>
       </p:sp>
       <p:pic>
         <p:nvPicPr>
-          <p:cNvPr id="4" name="Image 0" descr="preencoded.png">    </p:cNvPr>
+          <p:cNvPr id="4" name="Image 0" descr="preencoded.png"/>
           <p:cNvPicPr>
             <a:picLocks noChangeAspect="1"/>
           </p:cNvPicPr>
           <p:nvPr/>
         </p:nvPicPr>
         <p:blipFill>
-          <a:blip r:embed="rId1"/>
+          <a:blip r:embed="rId3"/>
           <a:stretch>
             <a:fillRect/>
           </a:stretch>
@@ -4825,7 +4871,7 @@
           <a:bodyPr wrap="square" lIns="0" tIns="0" rIns="0" bIns="0" rtlCol="0" anchor="t"/>
           <a:lstStyle/>
           <a:p>
-            <a:pPr indent="0" marL="0">
+            <a:pPr marL="0" indent="0">
               <a:buNone/>
             </a:pPr>
             <a:r>
@@ -4839,7 +4885,7 @@
             <a:endParaRPr lang="en-US" sz="1400" dirty="0"/>
           </a:p>
           <a:p>
-            <a:pPr indent="0" marL="0">
+            <a:pPr marL="0" indent="0">
               <a:buNone/>
             </a:pPr>
             <a:r>
@@ -4878,17 +4924,24 @@
             <a:prstDash val="solid"/>
           </a:ln>
         </p:spPr>
+        <p:txBody>
+          <a:bodyPr/>
+          <a:lstStyle/>
+          <a:p>
+            <a:endParaRPr lang="en-US"/>
+          </a:p>
+        </p:txBody>
       </p:sp>
       <p:pic>
         <p:nvPicPr>
-          <p:cNvPr id="7" name="Image 1" descr="preencoded.png">    </p:cNvPr>
+          <p:cNvPr id="7" name="Image 1" descr="preencoded.png"/>
           <p:cNvPicPr>
             <a:picLocks noChangeAspect="1"/>
           </p:cNvPicPr>
           <p:nvPr/>
         </p:nvPicPr>
         <p:blipFill>
-          <a:blip r:embed="rId2"/>
+          <a:blip r:embed="rId4"/>
           <a:stretch>
             <a:fillRect/>
           </a:stretch>
@@ -4924,7 +4977,7 @@
           <a:bodyPr wrap="square" lIns="0" tIns="0" rIns="0" bIns="0" rtlCol="0" anchor="t"/>
           <a:lstStyle/>
           <a:p>
-            <a:pPr indent="0" marL="0">
+            <a:pPr marL="0" indent="0">
               <a:buNone/>
             </a:pPr>
             <a:r>
@@ -4938,7 +4991,7 @@
             <a:endParaRPr lang="en-US" sz="1400" dirty="0"/>
           </a:p>
           <a:p>
-            <a:pPr indent="0" marL="0">
+            <a:pPr marL="0" indent="0">
               <a:buNone/>
             </a:pPr>
             <a:r>
@@ -4977,17 +5030,24 @@
             <a:prstDash val="solid"/>
           </a:ln>
         </p:spPr>
+        <p:txBody>
+          <a:bodyPr/>
+          <a:lstStyle/>
+          <a:p>
+            <a:endParaRPr lang="en-US"/>
+          </a:p>
+        </p:txBody>
       </p:sp>
       <p:pic>
         <p:nvPicPr>
-          <p:cNvPr id="10" name="Image 2" descr="preencoded.png">    </p:cNvPr>
+          <p:cNvPr id="10" name="Image 2" descr="preencoded.png"/>
           <p:cNvPicPr>
             <a:picLocks noChangeAspect="1"/>
           </p:cNvPicPr>
           <p:nvPr/>
         </p:nvPicPr>
         <p:blipFill>
-          <a:blip r:embed="rId3"/>
+          <a:blip r:embed="rId5"/>
           <a:stretch>
             <a:fillRect/>
           </a:stretch>
@@ -5023,7 +5083,7 @@
           <a:bodyPr wrap="square" lIns="0" tIns="0" rIns="0" bIns="0" rtlCol="0" anchor="t"/>
           <a:lstStyle/>
           <a:p>
-            <a:pPr indent="0" marL="0">
+            <a:pPr marL="0" indent="0">
               <a:buNone/>
             </a:pPr>
             <a:r>
@@ -5037,7 +5097,7 @@
             <a:endParaRPr lang="en-US" sz="1400" dirty="0"/>
           </a:p>
           <a:p>
-            <a:pPr indent="0" marL="0">
+            <a:pPr marL="0" indent="0">
               <a:buNone/>
             </a:pPr>
             <a:r>
@@ -5076,17 +5136,24 @@
             <a:prstDash val="solid"/>
           </a:ln>
         </p:spPr>
+        <p:txBody>
+          <a:bodyPr/>
+          <a:lstStyle/>
+          <a:p>
+            <a:endParaRPr lang="en-US"/>
+          </a:p>
+        </p:txBody>
       </p:sp>
       <p:pic>
         <p:nvPicPr>
-          <p:cNvPr id="13" name="Image 3" descr="preencoded.png">    </p:cNvPr>
+          <p:cNvPr id="13" name="Image 3" descr="preencoded.png"/>
           <p:cNvPicPr>
             <a:picLocks noChangeAspect="1"/>
           </p:cNvPicPr>
           <p:nvPr/>
         </p:nvPicPr>
         <p:blipFill>
-          <a:blip r:embed="rId4"/>
+          <a:blip r:embed="rId6"/>
           <a:stretch>
             <a:fillRect/>
           </a:stretch>
@@ -5122,7 +5189,7 @@
           <a:bodyPr wrap="square" lIns="0" tIns="0" rIns="0" bIns="0" rtlCol="0" anchor="t"/>
           <a:lstStyle/>
           <a:p>
-            <a:pPr indent="0" marL="0">
+            <a:pPr marL="0" indent="0">
               <a:buNone/>
             </a:pPr>
             <a:r>
@@ -5136,7 +5203,7 @@
             <a:endParaRPr lang="en-US" sz="1400" dirty="0"/>
           </a:p>
           <a:p>
-            <a:pPr indent="0" marL="0">
+            <a:pPr marL="0" indent="0">
               <a:buNone/>
             </a:pPr>
             <a:r>
@@ -5175,17 +5242,24 @@
             <a:prstDash val="solid"/>
           </a:ln>
         </p:spPr>
+        <p:txBody>
+          <a:bodyPr/>
+          <a:lstStyle/>
+          <a:p>
+            <a:endParaRPr lang="en-US"/>
+          </a:p>
+        </p:txBody>
       </p:sp>
       <p:pic>
         <p:nvPicPr>
-          <p:cNvPr id="16" name="Image 4" descr="preencoded.png">    </p:cNvPr>
+          <p:cNvPr id="16" name="Image 4" descr="preencoded.png"/>
           <p:cNvPicPr>
             <a:picLocks noChangeAspect="1"/>
           </p:cNvPicPr>
           <p:nvPr/>
         </p:nvPicPr>
         <p:blipFill>
-          <a:blip r:embed="rId5"/>
+          <a:blip r:embed="rId7"/>
           <a:stretch>
             <a:fillRect/>
           </a:stretch>
@@ -5221,7 +5295,7 @@
           <a:bodyPr wrap="square" lIns="0" tIns="0" rIns="0" bIns="0" rtlCol="0" anchor="t"/>
           <a:lstStyle/>
           <a:p>
-            <a:pPr indent="0" marL="0">
+            <a:pPr marL="0" indent="0">
               <a:buNone/>
             </a:pPr>
             <a:r>
@@ -5235,7 +5309,7 @@
             <a:endParaRPr lang="en-US" sz="1400" dirty="0"/>
           </a:p>
           <a:p>
-            <a:pPr indent="0" marL="0">
+            <a:pPr marL="0" indent="0">
               <a:buNone/>
             </a:pPr>
             <a:r>
@@ -5274,17 +5348,24 @@
             <a:prstDash val="solid"/>
           </a:ln>
         </p:spPr>
+        <p:txBody>
+          <a:bodyPr/>
+          <a:lstStyle/>
+          <a:p>
+            <a:endParaRPr lang="en-US"/>
+          </a:p>
+        </p:txBody>
       </p:sp>
       <p:pic>
         <p:nvPicPr>
-          <p:cNvPr id="19" name="Image 5" descr="preencoded.png">    </p:cNvPr>
+          <p:cNvPr id="19" name="Image 5" descr="preencoded.png"/>
           <p:cNvPicPr>
             <a:picLocks noChangeAspect="1"/>
           </p:cNvPicPr>
           <p:nvPr/>
         </p:nvPicPr>
         <p:blipFill>
-          <a:blip r:embed="rId6"/>
+          <a:blip r:embed="rId8"/>
           <a:stretch>
             <a:fillRect/>
           </a:stretch>
@@ -5320,7 +5401,7 @@
           <a:bodyPr wrap="square" lIns="0" tIns="0" rIns="0" bIns="0" rtlCol="0" anchor="t"/>
           <a:lstStyle/>
           <a:p>
-            <a:pPr indent="0" marL="0">
+            <a:pPr marL="0" indent="0">
               <a:buNone/>
             </a:pPr>
             <a:r>
@@ -5334,7 +5415,7 @@
             <a:endParaRPr lang="en-US" sz="1400" dirty="0"/>
           </a:p>
           <a:p>
-            <a:pPr indent="0" marL="0">
+            <a:pPr marL="0" indent="0">
               <a:buNone/>
             </a:pPr>
             <a:r>
@@ -5369,7 +5450,7 @@
           </a:prstGeom>
           <a:extLst>
             <a:ext uri="{C572A759-6A51-4108-AA02-DFA0A04FC94B}">
-              <ma14:wrappingTextBoxFlag xmlns:ma14="http://schemas.microsoft.com/office/mac/drawingml/2011/main" val="0"/>
+              <ma14:wrappingTextBoxFlag xmlns:ma14="http://schemas.microsoft.com/office/mac/drawingml/2011/main" xmlns="" val="0"/>
             </a:ext>
           </a:extLst>
         </p:spPr>
@@ -5387,7 +5468,7 @@
           <a:p>
             <a:pPr algn="r"/>
             <a:fld id="{F7021451-1387-4CA6-816F-3879F97B5CBC}" type="slidenum">
-              <a:rPr b="0" lang="en-US"/>
+              <a:rPr lang="en-US" b="0"/>
               <a:t>11</a:t>
             </a:fld>
             <a:endParaRPr lang="en-US"/>
@@ -5422,9 +5503,11 @@
       <p:sp>
         <p:nvSpPr>
           <p:cNvPr id="2" name="Text 0"/>
-          <p:cNvSpPr/>
+          <p:cNvSpPr>
+            <a:spLocks noGrp="1"/>
+          </p:cNvSpPr>
           <p:nvPr>
-            <p:ph idx="100" type="title" hasCustomPrompt="1"/>
+            <p:ph type="title" idx="100" hasCustomPrompt="1"/>
           </p:nvPr>
         </p:nvSpPr>
         <p:spPr>
@@ -5442,7 +5525,7 @@
           <a:bodyPr wrap="square" lIns="0" tIns="0" rIns="0" bIns="0" rtlCol="0" anchor="ctr"/>
           <a:lstStyle/>
           <a:p>
-            <a:pPr algn="l" indent="0" marL="0">
+            <a:pPr marL="0" indent="0" algn="l">
               <a:buNone/>
             </a:pPr>
             <a:r>
@@ -5481,17 +5564,24 @@
             <a:prstDash val="solid"/>
           </a:ln>
         </p:spPr>
+        <p:txBody>
+          <a:bodyPr/>
+          <a:lstStyle/>
+          <a:p>
+            <a:endParaRPr lang="en-US"/>
+          </a:p>
+        </p:txBody>
       </p:sp>
       <p:pic>
         <p:nvPicPr>
-          <p:cNvPr id="4" name="Image 0" descr="preencoded.png">    </p:cNvPr>
+          <p:cNvPr id="4" name="Image 0" descr="preencoded.png"/>
           <p:cNvPicPr>
             <a:picLocks noChangeAspect="1"/>
           </p:cNvPicPr>
           <p:nvPr/>
         </p:nvPicPr>
         <p:blipFill>
-          <a:blip r:embed="rId1"/>
+          <a:blip r:embed="rId3"/>
           <a:stretch>
             <a:fillRect/>
           </a:stretch>
@@ -5527,7 +5617,7 @@
           <a:bodyPr wrap="square" lIns="0" tIns="0" rIns="0" bIns="0" rtlCol="0" anchor="t"/>
           <a:lstStyle/>
           <a:p>
-            <a:pPr indent="0" marL="0">
+            <a:pPr marL="0" indent="0">
               <a:buNone/>
             </a:pPr>
             <a:r>
@@ -5563,7 +5653,7 @@
           <a:bodyPr wrap="square" lIns="0" tIns="0" rIns="0" bIns="0" rtlCol="0" anchor="t"/>
           <a:lstStyle/>
           <a:p>
-            <a:pPr indent="0" marL="0">
+            <a:pPr marL="0" indent="0">
               <a:buNone/>
             </a:pPr>
             <a:r>
@@ -5602,17 +5692,24 @@
             <a:prstDash val="solid"/>
           </a:ln>
         </p:spPr>
+        <p:txBody>
+          <a:bodyPr/>
+          <a:lstStyle/>
+          <a:p>
+            <a:endParaRPr lang="en-US"/>
+          </a:p>
+        </p:txBody>
       </p:sp>
       <p:pic>
         <p:nvPicPr>
-          <p:cNvPr id="8" name="Image 1" descr="preencoded.png">    </p:cNvPr>
+          <p:cNvPr id="8" name="Image 1" descr="preencoded.png"/>
           <p:cNvPicPr>
             <a:picLocks noChangeAspect="1"/>
           </p:cNvPicPr>
           <p:nvPr/>
         </p:nvPicPr>
         <p:blipFill>
-          <a:blip r:embed="rId2"/>
+          <a:blip r:embed="rId4"/>
           <a:stretch>
             <a:fillRect/>
           </a:stretch>
@@ -5648,7 +5745,7 @@
           <a:bodyPr wrap="square" lIns="0" tIns="0" rIns="0" bIns="0" rtlCol="0" anchor="t"/>
           <a:lstStyle/>
           <a:p>
-            <a:pPr indent="0" marL="0">
+            <a:pPr marL="0" indent="0">
               <a:buNone/>
             </a:pPr>
             <a:r>
@@ -5684,7 +5781,7 @@
           <a:bodyPr wrap="square" lIns="0" tIns="0" rIns="0" bIns="0" rtlCol="0" anchor="t"/>
           <a:lstStyle/>
           <a:p>
-            <a:pPr indent="0" marL="0">
+            <a:pPr marL="0" indent="0">
               <a:buNone/>
             </a:pPr>
             <a:r>
@@ -5723,17 +5820,24 @@
             <a:prstDash val="solid"/>
           </a:ln>
         </p:spPr>
+        <p:txBody>
+          <a:bodyPr/>
+          <a:lstStyle/>
+          <a:p>
+            <a:endParaRPr lang="en-US"/>
+          </a:p>
+        </p:txBody>
       </p:sp>
       <p:pic>
         <p:nvPicPr>
-          <p:cNvPr id="12" name="Image 2" descr="preencoded.png">    </p:cNvPr>
+          <p:cNvPr id="12" name="Image 2" descr="preencoded.png"/>
           <p:cNvPicPr>
             <a:picLocks noChangeAspect="1"/>
           </p:cNvPicPr>
           <p:nvPr/>
         </p:nvPicPr>
         <p:blipFill>
-          <a:blip r:embed="rId3"/>
+          <a:blip r:embed="rId5"/>
           <a:stretch>
             <a:fillRect/>
           </a:stretch>
@@ -5769,7 +5873,7 @@
           <a:bodyPr wrap="square" lIns="0" tIns="0" rIns="0" bIns="0" rtlCol="0" anchor="t"/>
           <a:lstStyle/>
           <a:p>
-            <a:pPr indent="0" marL="0">
+            <a:pPr marL="0" indent="0">
               <a:buNone/>
             </a:pPr>
             <a:r>
@@ -5805,7 +5909,7 @@
           <a:bodyPr wrap="square" lIns="0" tIns="0" rIns="0" bIns="0" rtlCol="0" anchor="t"/>
           <a:lstStyle/>
           <a:p>
-            <a:pPr indent="0" marL="0">
+            <a:pPr marL="0" indent="0">
               <a:buNone/>
             </a:pPr>
             <a:r>
@@ -5844,17 +5948,24 @@
             <a:prstDash val="solid"/>
           </a:ln>
         </p:spPr>
+        <p:txBody>
+          <a:bodyPr/>
+          <a:lstStyle/>
+          <a:p>
+            <a:endParaRPr lang="en-US"/>
+          </a:p>
+        </p:txBody>
       </p:sp>
       <p:pic>
         <p:nvPicPr>
-          <p:cNvPr id="16" name="Image 3" descr="preencoded.png">    </p:cNvPr>
+          <p:cNvPr id="16" name="Image 3" descr="preencoded.png"/>
           <p:cNvPicPr>
             <a:picLocks noChangeAspect="1"/>
           </p:cNvPicPr>
           <p:nvPr/>
         </p:nvPicPr>
         <p:blipFill>
-          <a:blip r:embed="rId4"/>
+          <a:blip r:embed="rId6"/>
           <a:stretch>
             <a:fillRect/>
           </a:stretch>
@@ -5890,7 +6001,7 @@
           <a:bodyPr wrap="square" lIns="0" tIns="0" rIns="0" bIns="0" rtlCol="0" anchor="t"/>
           <a:lstStyle/>
           <a:p>
-            <a:pPr indent="0" marL="0">
+            <a:pPr marL="0" indent="0">
               <a:buNone/>
             </a:pPr>
             <a:r>
@@ -5926,7 +6037,7 @@
           <a:bodyPr wrap="square" lIns="0" tIns="0" rIns="0" bIns="0" rtlCol="0" anchor="t"/>
           <a:lstStyle/>
           <a:p>
-            <a:pPr indent="0" marL="0">
+            <a:pPr marL="0" indent="0">
               <a:buNone/>
             </a:pPr>
             <a:r>
@@ -5962,7 +6073,7 @@
           <a:bodyPr wrap="square" lIns="0" tIns="0" rIns="0" bIns="0" rtlCol="0" anchor="t"/>
           <a:lstStyle/>
           <a:p>
-            <a:pPr indent="0" marL="0">
+            <a:pPr marL="0" indent="0">
               <a:buNone/>
             </a:pPr>
             <a:r>
@@ -6001,7 +6112,7 @@
           <a:bodyPr wrap="square" lIns="0" tIns="0" rIns="0" bIns="0" rtlCol="0" anchor="t"/>
           <a:lstStyle/>
           <a:p>
-            <a:pPr indent="0" marL="0">
+            <a:pPr marL="0" indent="0">
               <a:buNone/>
             </a:pPr>
             <a:r>
@@ -6036,7 +6147,7 @@
           </a:prstGeom>
           <a:extLst>
             <a:ext uri="{C572A759-6A51-4108-AA02-DFA0A04FC94B}">
-              <ma14:wrappingTextBoxFlag xmlns:ma14="http://schemas.microsoft.com/office/mac/drawingml/2011/main" val="0"/>
+              <ma14:wrappingTextBoxFlag xmlns:ma14="http://schemas.microsoft.com/office/mac/drawingml/2011/main" xmlns="" val="0"/>
             </a:ext>
           </a:extLst>
         </p:spPr>
@@ -6054,7 +6165,7 @@
           <a:p>
             <a:pPr algn="r"/>
             <a:fld id="{F7021451-1387-4CA6-816F-3879F97B5CBC}" type="slidenum">
-              <a:rPr b="0" lang="en-US"/>
+              <a:rPr lang="en-US" b="0"/>
               <a:t>12</a:t>
             </a:fld>
             <a:endParaRPr lang="en-US"/>
@@ -6089,9 +6200,11 @@
       <p:sp>
         <p:nvSpPr>
           <p:cNvPr id="2" name="Text 0"/>
-          <p:cNvSpPr/>
+          <p:cNvSpPr>
+            <a:spLocks noGrp="1"/>
+          </p:cNvSpPr>
           <p:nvPr>
-            <p:ph idx="100" type="title" hasCustomPrompt="1"/>
+            <p:ph type="title" idx="100" hasCustomPrompt="1"/>
           </p:nvPr>
         </p:nvSpPr>
         <p:spPr>
@@ -6109,7 +6222,7 @@
           <a:bodyPr wrap="square" lIns="0" tIns="0" rIns="0" bIns="0" rtlCol="0" anchor="ctr"/>
           <a:lstStyle/>
           <a:p>
-            <a:pPr algn="l" indent="0" marL="0">
+            <a:pPr marL="0" indent="0" algn="l">
               <a:buNone/>
             </a:pPr>
             <a:r>
@@ -6145,7 +6258,7 @@
           <a:bodyPr wrap="square" lIns="0" tIns="0" rIns="0" bIns="0" rtlCol="0" anchor="t"/>
           <a:lstStyle/>
           <a:p>
-            <a:pPr indent="0" marL="0">
+            <a:pPr marL="0" indent="0">
               <a:buNone/>
             </a:pPr>
             <a:r>
@@ -6186,6 +6299,13 @@
             <a:prstDash val="solid"/>
           </a:ln>
         </p:spPr>
+        <p:txBody>
+          <a:bodyPr/>
+          <a:lstStyle/>
+          <a:p>
+            <a:endParaRPr lang="en-US"/>
+          </a:p>
+        </p:txBody>
       </p:sp>
       <p:sp>
         <p:nvSpPr>
@@ -6211,17 +6331,24 @@
             <a:prstDash val="solid"/>
           </a:ln>
         </p:spPr>
+        <p:txBody>
+          <a:bodyPr/>
+          <a:lstStyle/>
+          <a:p>
+            <a:endParaRPr lang="en-US"/>
+          </a:p>
+        </p:txBody>
       </p:sp>
       <p:pic>
         <p:nvPicPr>
-          <p:cNvPr id="6" name="Image 0" descr="preencoded.png">    </p:cNvPr>
+          <p:cNvPr id="6" name="Image 0" descr="preencoded.png"/>
           <p:cNvPicPr>
             <a:picLocks noChangeAspect="1"/>
           </p:cNvPicPr>
           <p:nvPr/>
         </p:nvPicPr>
         <p:blipFill>
-          <a:blip r:embed="rId1"/>
+          <a:blip r:embed="rId3"/>
           <a:stretch>
             <a:fillRect/>
           </a:stretch>
@@ -6257,7 +6384,7 @@
           <a:bodyPr wrap="square" lIns="0" tIns="0" rIns="0" bIns="0" rtlCol="0" anchor="t"/>
           <a:lstStyle/>
           <a:p>
-            <a:pPr indent="0" marL="0">
+            <a:pPr marL="0" indent="0">
               <a:buNone/>
             </a:pPr>
             <a:r>
@@ -6293,7 +6420,7 @@
           <a:bodyPr wrap="square" lIns="0" tIns="0" rIns="0" bIns="0" rtlCol="0" anchor="t"/>
           <a:lstStyle/>
           <a:p>
-            <a:pPr indent="0" marL="0">
+            <a:pPr marL="0" indent="0">
               <a:buNone/>
             </a:pPr>
             <a:r>
@@ -6334,6 +6461,13 @@
             <a:prstDash val="solid"/>
           </a:ln>
         </p:spPr>
+        <p:txBody>
+          <a:bodyPr/>
+          <a:lstStyle/>
+          <a:p>
+            <a:endParaRPr lang="en-US"/>
+          </a:p>
+        </p:txBody>
       </p:sp>
       <p:sp>
         <p:nvSpPr>
@@ -6359,17 +6493,24 @@
             <a:prstDash val="solid"/>
           </a:ln>
         </p:spPr>
+        <p:txBody>
+          <a:bodyPr/>
+          <a:lstStyle/>
+          <a:p>
+            <a:endParaRPr lang="en-US"/>
+          </a:p>
+        </p:txBody>
       </p:sp>
       <p:pic>
         <p:nvPicPr>
-          <p:cNvPr id="11" name="Image 1" descr="preencoded.png">    </p:cNvPr>
+          <p:cNvPr id="11" name="Image 1" descr="preencoded.png"/>
           <p:cNvPicPr>
             <a:picLocks noChangeAspect="1"/>
           </p:cNvPicPr>
           <p:nvPr/>
         </p:nvPicPr>
         <p:blipFill>
-          <a:blip r:embed="rId2"/>
+          <a:blip r:embed="rId4"/>
           <a:stretch>
             <a:fillRect/>
           </a:stretch>
@@ -6405,7 +6546,7 @@
           <a:bodyPr wrap="square" lIns="0" tIns="0" rIns="0" bIns="0" rtlCol="0" anchor="t"/>
           <a:lstStyle/>
           <a:p>
-            <a:pPr indent="0" marL="0">
+            <a:pPr marL="0" indent="0">
               <a:buNone/>
             </a:pPr>
             <a:r>
@@ -6441,7 +6582,7 @@
           <a:bodyPr wrap="square" lIns="0" tIns="0" rIns="0" bIns="0" rtlCol="0" anchor="t"/>
           <a:lstStyle/>
           <a:p>
-            <a:pPr indent="0" marL="0">
+            <a:pPr marL="0" indent="0">
               <a:buNone/>
             </a:pPr>
             <a:r>
@@ -6477,7 +6618,7 @@
           <a:bodyPr wrap="square" lIns="0" tIns="0" rIns="0" bIns="0" rtlCol="0" anchor="t"/>
           <a:lstStyle/>
           <a:p>
-            <a:pPr indent="0" marL="0">
+            <a:pPr marL="0" indent="0">
               <a:buNone/>
             </a:pPr>
             <a:r>
@@ -6516,17 +6657,24 @@
             <a:prstDash val="solid"/>
           </a:ln>
         </p:spPr>
+        <p:txBody>
+          <a:bodyPr/>
+          <a:lstStyle/>
+          <a:p>
+            <a:endParaRPr lang="en-US"/>
+          </a:p>
+        </p:txBody>
       </p:sp>
       <p:pic>
         <p:nvPicPr>
-          <p:cNvPr id="16" name="Image 2" descr="preencoded.png">    </p:cNvPr>
+          <p:cNvPr id="16" name="Image 2" descr="preencoded.png"/>
           <p:cNvPicPr>
             <a:picLocks noChangeAspect="1"/>
           </p:cNvPicPr>
           <p:nvPr/>
         </p:nvPicPr>
         <p:blipFill>
-          <a:blip r:embed="rId3"/>
+          <a:blip r:embed="rId5"/>
           <a:stretch>
             <a:fillRect/>
           </a:stretch>
@@ -6562,7 +6710,7 @@
           <a:bodyPr wrap="square" lIns="0" tIns="0" rIns="0" bIns="0" rtlCol="0" anchor="t"/>
           <a:lstStyle/>
           <a:p>
-            <a:pPr indent="0" marL="0">
+            <a:pPr marL="0" indent="0">
               <a:buNone/>
             </a:pPr>
             <a:r>
@@ -6576,7 +6724,7 @@
             <a:endParaRPr lang="en-US" sz="1400" dirty="0"/>
           </a:p>
           <a:p>
-            <a:pPr indent="0" marL="0">
+            <a:pPr marL="0" indent="0">
               <a:buNone/>
             </a:pPr>
             <a:r>
@@ -6615,17 +6763,24 @@
             <a:prstDash val="solid"/>
           </a:ln>
         </p:spPr>
+        <p:txBody>
+          <a:bodyPr/>
+          <a:lstStyle/>
+          <a:p>
+            <a:endParaRPr lang="en-US"/>
+          </a:p>
+        </p:txBody>
       </p:sp>
       <p:pic>
         <p:nvPicPr>
-          <p:cNvPr id="19" name="Image 3" descr="preencoded.png">    </p:cNvPr>
+          <p:cNvPr id="19" name="Image 3" descr="preencoded.png"/>
           <p:cNvPicPr>
             <a:picLocks noChangeAspect="1"/>
           </p:cNvPicPr>
           <p:nvPr/>
         </p:nvPicPr>
         <p:blipFill>
-          <a:blip r:embed="rId4"/>
+          <a:blip r:embed="rId6"/>
           <a:stretch>
             <a:fillRect/>
           </a:stretch>
@@ -6661,7 +6816,7 @@
           <a:bodyPr wrap="square" lIns="0" tIns="0" rIns="0" bIns="0" rtlCol="0" anchor="t"/>
           <a:lstStyle/>
           <a:p>
-            <a:pPr indent="0" marL="0">
+            <a:pPr marL="0" indent="0">
               <a:buNone/>
             </a:pPr>
             <a:r>
@@ -6675,7 +6830,7 @@
             <a:endParaRPr lang="en-US" sz="1400" dirty="0"/>
           </a:p>
           <a:p>
-            <a:pPr indent="0" marL="0">
+            <a:pPr marL="0" indent="0">
               <a:buNone/>
             </a:pPr>
             <a:r>
@@ -6714,17 +6869,24 @@
             <a:prstDash val="solid"/>
           </a:ln>
         </p:spPr>
+        <p:txBody>
+          <a:bodyPr/>
+          <a:lstStyle/>
+          <a:p>
+            <a:endParaRPr lang="en-US"/>
+          </a:p>
+        </p:txBody>
       </p:sp>
       <p:pic>
         <p:nvPicPr>
-          <p:cNvPr id="22" name="Image 4" descr="preencoded.png">    </p:cNvPr>
+          <p:cNvPr id="22" name="Image 4" descr="preencoded.png"/>
           <p:cNvPicPr>
             <a:picLocks noChangeAspect="1"/>
           </p:cNvPicPr>
           <p:nvPr/>
         </p:nvPicPr>
         <p:blipFill>
-          <a:blip r:embed="rId5"/>
+          <a:blip r:embed="rId7"/>
           <a:stretch>
             <a:fillRect/>
           </a:stretch>
@@ -6760,7 +6922,7 @@
           <a:bodyPr wrap="square" lIns="0" tIns="0" rIns="0" bIns="0" rtlCol="0" anchor="t"/>
           <a:lstStyle/>
           <a:p>
-            <a:pPr indent="0" marL="0">
+            <a:pPr marL="0" indent="0">
               <a:buNone/>
             </a:pPr>
             <a:r>
@@ -6774,7 +6936,7 @@
             <a:endParaRPr lang="en-US" sz="1400" dirty="0"/>
           </a:p>
           <a:p>
-            <a:pPr indent="0" marL="0">
+            <a:pPr marL="0" indent="0">
               <a:buNone/>
             </a:pPr>
             <a:r>
@@ -6809,7 +6971,7 @@
           </a:prstGeom>
           <a:extLst>
             <a:ext uri="{C572A759-6A51-4108-AA02-DFA0A04FC94B}">
-              <ma14:wrappingTextBoxFlag xmlns:ma14="http://schemas.microsoft.com/office/mac/drawingml/2011/main" val="0"/>
+              <ma14:wrappingTextBoxFlag xmlns:ma14="http://schemas.microsoft.com/office/mac/drawingml/2011/main" xmlns="" val="0"/>
             </a:ext>
           </a:extLst>
         </p:spPr>
@@ -6827,7 +6989,7 @@
           <a:p>
             <a:pPr algn="r"/>
             <a:fld id="{F7021451-1387-4CA6-816F-3879F97B5CBC}" type="slidenum">
-              <a:rPr b="0" lang="en-US"/>
+              <a:rPr lang="en-US" b="0"/>
               <a:t>2</a:t>
             </a:fld>
             <a:endParaRPr lang="en-US"/>
@@ -6862,9 +7024,11 @@
       <p:sp>
         <p:nvSpPr>
           <p:cNvPr id="2" name="Text 0"/>
-          <p:cNvSpPr/>
+          <p:cNvSpPr>
+            <a:spLocks noGrp="1"/>
+          </p:cNvSpPr>
           <p:nvPr>
-            <p:ph idx="100" type="title" hasCustomPrompt="1"/>
+            <p:ph type="title" idx="100" hasCustomPrompt="1"/>
           </p:nvPr>
         </p:nvSpPr>
         <p:spPr>
@@ -6882,7 +7046,7 @@
           <a:bodyPr wrap="square" lIns="0" tIns="0" rIns="0" bIns="0" rtlCol="0" anchor="ctr"/>
           <a:lstStyle/>
           <a:p>
-            <a:pPr algn="l" indent="0" marL="0">
+            <a:pPr marL="0" indent="0" algn="l">
               <a:buNone/>
             </a:pPr>
             <a:r>
@@ -6918,7 +7082,7 @@
           <a:bodyPr wrap="square" lIns="0" tIns="0" rIns="0" bIns="0" rtlCol="0" anchor="t"/>
           <a:lstStyle/>
           <a:p>
-            <a:pPr indent="0" marL="0">
+            <a:pPr marL="0" indent="0">
               <a:buNone/>
             </a:pPr>
             <a:r>
@@ -6959,6 +7123,13 @@
             <a:prstDash val="solid"/>
           </a:ln>
         </p:spPr>
+        <p:txBody>
+          <a:bodyPr/>
+          <a:lstStyle/>
+          <a:p>
+            <a:endParaRPr lang="en-US"/>
+          </a:p>
+        </p:txBody>
       </p:sp>
       <p:sp>
         <p:nvSpPr>
@@ -6984,17 +7155,24 @@
             <a:prstDash val="solid"/>
           </a:ln>
         </p:spPr>
+        <p:txBody>
+          <a:bodyPr/>
+          <a:lstStyle/>
+          <a:p>
+            <a:endParaRPr lang="en-US"/>
+          </a:p>
+        </p:txBody>
       </p:sp>
       <p:pic>
         <p:nvPicPr>
-          <p:cNvPr id="6" name="Image 0" descr="preencoded.png">    </p:cNvPr>
+          <p:cNvPr id="6" name="Image 0" descr="preencoded.png"/>
           <p:cNvPicPr>
             <a:picLocks noChangeAspect="1"/>
           </p:cNvPicPr>
           <p:nvPr/>
         </p:nvPicPr>
         <p:blipFill>
-          <a:blip r:embed="rId1"/>
+          <a:blip r:embed="rId3"/>
           <a:stretch>
             <a:fillRect/>
           </a:stretch>
@@ -7030,11 +7208,11 @@
           <a:bodyPr wrap="square" lIns="0" tIns="0" rIns="0" bIns="0" rtlCol="0" anchor="t"/>
           <a:lstStyle/>
           <a:p>
-            <a:pPr indent="0" marL="0">
-              <a:buNone/>
-            </a:pPr>
-            <a:r>
-              <a:rPr lang="en-US" sz="1200" b="1" spc="100" kern="0" dirty="0">
+            <a:pPr marL="0" indent="0">
+              <a:buNone/>
+            </a:pPr>
+            <a:r>
+              <a:rPr lang="en-US" sz="1200" b="1" kern="0" spc="100" dirty="0">
                 <a:solidFill>
                   <a:schemeClr val="accent1"/>
                 </a:solidFill>
@@ -7066,7 +7244,7 @@
           <a:bodyPr wrap="square" lIns="0" tIns="0" rIns="0" bIns="0" rtlCol="0" anchor="t"/>
           <a:lstStyle/>
           <a:p>
-            <a:pPr indent="0" marL="0">
+            <a:pPr marL="0" indent="0">
               <a:buNone/>
             </a:pPr>
             <a:r>
@@ -7102,7 +7280,7 @@
           <a:bodyPr wrap="square" lIns="0" tIns="0" rIns="0" bIns="0" rtlCol="0" anchor="t"/>
           <a:lstStyle/>
           <a:p>
-            <a:pPr indent="0" marL="0">
+            <a:pPr marL="0" indent="0">
               <a:buNone/>
             </a:pPr>
             <a:r>
@@ -7113,9 +7291,6 @@
               </a:rPr>
               <a:t>Attack succeeds if: </a:t>
             </a:r>
-            <a:pPr indent="0" marL="0">
-              <a:buNone/>
-            </a:pPr>
             <a:r>
               <a:rPr lang="en-US" sz="1300" dirty="0">
                 <a:solidFill>
@@ -7154,6 +7329,13 @@
             <a:prstDash val="solid"/>
           </a:ln>
         </p:spPr>
+        <p:txBody>
+          <a:bodyPr/>
+          <a:lstStyle/>
+          <a:p>
+            <a:endParaRPr lang="en-US"/>
+          </a:p>
+        </p:txBody>
       </p:sp>
       <p:sp>
         <p:nvSpPr>
@@ -7179,17 +7361,24 @@
             <a:prstDash val="solid"/>
           </a:ln>
         </p:spPr>
+        <p:txBody>
+          <a:bodyPr/>
+          <a:lstStyle/>
+          <a:p>
+            <a:endParaRPr lang="en-US"/>
+          </a:p>
+        </p:txBody>
       </p:sp>
       <p:pic>
         <p:nvPicPr>
-          <p:cNvPr id="12" name="Image 1" descr="preencoded.png">    </p:cNvPr>
+          <p:cNvPr id="12" name="Image 1" descr="preencoded.png"/>
           <p:cNvPicPr>
             <a:picLocks noChangeAspect="1"/>
           </p:cNvPicPr>
           <p:nvPr/>
         </p:nvPicPr>
         <p:blipFill>
-          <a:blip r:embed="rId2"/>
+          <a:blip r:embed="rId4"/>
           <a:stretch>
             <a:fillRect/>
           </a:stretch>
@@ -7225,11 +7414,11 @@
           <a:bodyPr wrap="square" lIns="0" tIns="0" rIns="0" bIns="0" rtlCol="0" anchor="t"/>
           <a:lstStyle/>
           <a:p>
-            <a:pPr indent="0" marL="0">
-              <a:buNone/>
-            </a:pPr>
-            <a:r>
-              <a:rPr lang="en-US" sz="1200" b="1" spc="100" kern="0" dirty="0">
+            <a:pPr marL="0" indent="0">
+              <a:buNone/>
+            </a:pPr>
+            <a:r>
+              <a:rPr lang="en-US" sz="1200" b="1" kern="0" spc="100" dirty="0">
                 <a:solidFill>
                   <a:schemeClr val="accent1"/>
                 </a:solidFill>
@@ -7261,7 +7450,7 @@
           <a:bodyPr wrap="square" lIns="0" tIns="0" rIns="0" bIns="0" rtlCol="0" anchor="t"/>
           <a:lstStyle/>
           <a:p>
-            <a:pPr indent="0" marL="0">
+            <a:pPr marL="0" indent="0">
               <a:buNone/>
             </a:pPr>
             <a:r>
@@ -7297,7 +7486,7 @@
           <a:bodyPr wrap="square" lIns="0" tIns="0" rIns="0" bIns="0" rtlCol="0" anchor="t"/>
           <a:lstStyle/>
           <a:p>
-            <a:pPr indent="0" marL="0">
+            <a:pPr marL="0" indent="0">
               <a:buNone/>
             </a:pPr>
             <a:r>
@@ -7308,9 +7497,6 @@
               </a:rPr>
               <a:t>Attack succeeds if: </a:t>
             </a:r>
-            <a:pPr indent="0" marL="0">
-              <a:buNone/>
-            </a:pPr>
             <a:r>
               <a:rPr lang="en-US" sz="1300" dirty="0">
                 <a:solidFill>
@@ -7349,6 +7535,13 @@
             <a:prstDash val="solid"/>
           </a:ln>
         </p:spPr>
+        <p:txBody>
+          <a:bodyPr/>
+          <a:lstStyle/>
+          <a:p>
+            <a:endParaRPr lang="en-US"/>
+          </a:p>
+        </p:txBody>
       </p:sp>
       <p:sp>
         <p:nvSpPr>
@@ -7374,17 +7567,24 @@
             <a:prstDash val="solid"/>
           </a:ln>
         </p:spPr>
+        <p:txBody>
+          <a:bodyPr/>
+          <a:lstStyle/>
+          <a:p>
+            <a:endParaRPr lang="en-US"/>
+          </a:p>
+        </p:txBody>
       </p:sp>
       <p:pic>
         <p:nvPicPr>
-          <p:cNvPr id="18" name="Image 2" descr="preencoded.png">    </p:cNvPr>
+          <p:cNvPr id="18" name="Image 2" descr="preencoded.png"/>
           <p:cNvPicPr>
             <a:picLocks noChangeAspect="1"/>
           </p:cNvPicPr>
           <p:nvPr/>
         </p:nvPicPr>
         <p:blipFill>
-          <a:blip r:embed="rId3"/>
+          <a:blip r:embed="rId5"/>
           <a:stretch>
             <a:fillRect/>
           </a:stretch>
@@ -7420,11 +7620,11 @@
           <a:bodyPr wrap="square" lIns="0" tIns="0" rIns="0" bIns="0" rtlCol="0" anchor="t"/>
           <a:lstStyle/>
           <a:p>
-            <a:pPr indent="0" marL="0">
-              <a:buNone/>
-            </a:pPr>
-            <a:r>
-              <a:rPr lang="en-US" sz="1200" b="1" spc="100" kern="0" dirty="0">
+            <a:pPr marL="0" indent="0">
+              <a:buNone/>
+            </a:pPr>
+            <a:r>
+              <a:rPr lang="en-US" sz="1200" b="1" kern="0" spc="100" dirty="0">
                 <a:solidFill>
                   <a:schemeClr val="accent1"/>
                 </a:solidFill>
@@ -7456,7 +7656,7 @@
           <a:bodyPr wrap="square" lIns="0" tIns="0" rIns="0" bIns="0" rtlCol="0" anchor="t"/>
           <a:lstStyle/>
           <a:p>
-            <a:pPr indent="0" marL="0">
+            <a:pPr marL="0" indent="0">
               <a:buNone/>
             </a:pPr>
             <a:r>
@@ -7492,7 +7692,7 @@
           <a:bodyPr wrap="square" lIns="0" tIns="0" rIns="0" bIns="0" rtlCol="0" anchor="t"/>
           <a:lstStyle/>
           <a:p>
-            <a:pPr indent="0" marL="0">
+            <a:pPr marL="0" indent="0">
               <a:buNone/>
             </a:pPr>
             <a:r>
@@ -7503,9 +7703,6 @@
               </a:rPr>
               <a:t>Attack succeeds if: </a:t>
             </a:r>
-            <a:pPr indent="0" marL="0">
-              <a:buNone/>
-            </a:pPr>
             <a:r>
               <a:rPr lang="en-US" sz="1300" dirty="0">
                 <a:solidFill>
@@ -7544,6 +7741,13 @@
             <a:prstDash val="solid"/>
           </a:ln>
         </p:spPr>
+        <p:txBody>
+          <a:bodyPr/>
+          <a:lstStyle/>
+          <a:p>
+            <a:endParaRPr lang="en-US"/>
+          </a:p>
+        </p:txBody>
       </p:sp>
       <p:sp>
         <p:nvSpPr>
@@ -7569,17 +7773,24 @@
             <a:prstDash val="solid"/>
           </a:ln>
         </p:spPr>
+        <p:txBody>
+          <a:bodyPr/>
+          <a:lstStyle/>
+          <a:p>
+            <a:endParaRPr lang="en-US"/>
+          </a:p>
+        </p:txBody>
       </p:sp>
       <p:pic>
         <p:nvPicPr>
-          <p:cNvPr id="24" name="Image 3" descr="preencoded.png">    </p:cNvPr>
+          <p:cNvPr id="24" name="Image 3" descr="preencoded.png"/>
           <p:cNvPicPr>
             <a:picLocks noChangeAspect="1"/>
           </p:cNvPicPr>
           <p:nvPr/>
         </p:nvPicPr>
         <p:blipFill>
-          <a:blip r:embed="rId4"/>
+          <a:blip r:embed="rId6"/>
           <a:stretch>
             <a:fillRect/>
           </a:stretch>
@@ -7615,11 +7826,11 @@
           <a:bodyPr wrap="square" lIns="0" tIns="0" rIns="0" bIns="0" rtlCol="0" anchor="t"/>
           <a:lstStyle/>
           <a:p>
-            <a:pPr indent="0" marL="0">
-              <a:buNone/>
-            </a:pPr>
-            <a:r>
-              <a:rPr lang="en-US" sz="1200" b="1" spc="100" kern="0" dirty="0">
+            <a:pPr marL="0" indent="0">
+              <a:buNone/>
+            </a:pPr>
+            <a:r>
+              <a:rPr lang="en-US" sz="1200" b="1" kern="0" spc="100" dirty="0">
                 <a:solidFill>
                   <a:schemeClr val="accent1"/>
                 </a:solidFill>
@@ -7651,7 +7862,7 @@
           <a:bodyPr wrap="square" lIns="0" tIns="0" rIns="0" bIns="0" rtlCol="0" anchor="t"/>
           <a:lstStyle/>
           <a:p>
-            <a:pPr indent="0" marL="0">
+            <a:pPr marL="0" indent="0">
               <a:buNone/>
             </a:pPr>
             <a:r>
@@ -7687,7 +7898,7 @@
           <a:bodyPr wrap="square" lIns="0" tIns="0" rIns="0" bIns="0" rtlCol="0" anchor="t"/>
           <a:lstStyle/>
           <a:p>
-            <a:pPr indent="0" marL="0">
+            <a:pPr marL="0" indent="0">
               <a:buNone/>
             </a:pPr>
             <a:r>
@@ -7698,9 +7909,6 @@
               </a:rPr>
               <a:t>Attack succeeds if: </a:t>
             </a:r>
-            <a:pPr indent="0" marL="0">
-              <a:buNone/>
-            </a:pPr>
             <a:r>
               <a:rPr lang="en-US" sz="1300" dirty="0">
                 <a:solidFill>
@@ -7715,7 +7923,7 @@
       </p:sp>
       <p:sp>
         <p:nvSpPr>
-          <p:cNvPr id="25" name="Slide Number Placeholder 0"/>
+          <p:cNvPr id="28" name="Slide Number Placeholder 0"/>
           <p:cNvSpPr>
             <a:spLocks noGrp="1"/>
           </p:cNvSpPr>
@@ -7733,7 +7941,7 @@
           </a:prstGeom>
           <a:extLst>
             <a:ext uri="{C572A759-6A51-4108-AA02-DFA0A04FC94B}">
-              <ma14:wrappingTextBoxFlag xmlns:ma14="http://schemas.microsoft.com/office/mac/drawingml/2011/main" val="0"/>
+              <ma14:wrappingTextBoxFlag xmlns:ma14="http://schemas.microsoft.com/office/mac/drawingml/2011/main" xmlns="" val="0"/>
             </a:ext>
           </a:extLst>
         </p:spPr>
@@ -7751,7 +7959,7 @@
           <a:p>
             <a:pPr algn="r"/>
             <a:fld id="{F7021451-1387-4CA6-816F-3879F97B5CBC}" type="slidenum">
-              <a:rPr b="0" lang="en-US"/>
+              <a:rPr lang="en-US" b="0"/>
               <a:t>3</a:t>
             </a:fld>
             <a:endParaRPr lang="en-US"/>
@@ -7786,9 +7994,11 @@
       <p:sp>
         <p:nvSpPr>
           <p:cNvPr id="2" name="Text 0"/>
-          <p:cNvSpPr/>
+          <p:cNvSpPr>
+            <a:spLocks noGrp="1"/>
+          </p:cNvSpPr>
           <p:nvPr>
-            <p:ph idx="100" type="title" hasCustomPrompt="1"/>
+            <p:ph type="title" idx="100" hasCustomPrompt="1"/>
           </p:nvPr>
         </p:nvSpPr>
         <p:spPr>
@@ -7806,7 +8016,7 @@
           <a:bodyPr wrap="square" lIns="0" tIns="0" rIns="0" bIns="0" rtlCol="0" anchor="ctr"/>
           <a:lstStyle/>
           <a:p>
-            <a:pPr algn="l" indent="0" marL="0">
+            <a:pPr marL="0" indent="0" algn="l">
               <a:buNone/>
             </a:pPr>
             <a:r>
@@ -7847,17 +8057,24 @@
             <a:prstDash val="solid"/>
           </a:ln>
         </p:spPr>
+        <p:txBody>
+          <a:bodyPr/>
+          <a:lstStyle/>
+          <a:p>
+            <a:endParaRPr lang="en-US"/>
+          </a:p>
+        </p:txBody>
       </p:sp>
       <p:pic>
         <p:nvPicPr>
-          <p:cNvPr id="4" name="Image 0" descr="preencoded.png">    </p:cNvPr>
+          <p:cNvPr id="4" name="Image 0" descr="preencoded.png"/>
           <p:cNvPicPr>
             <a:picLocks noChangeAspect="1"/>
           </p:cNvPicPr>
           <p:nvPr/>
         </p:nvPicPr>
         <p:blipFill>
-          <a:blip r:embed="rId1"/>
+          <a:blip r:embed="rId3"/>
           <a:stretch>
             <a:fillRect/>
           </a:stretch>
@@ -7893,7 +8110,7 @@
           <a:bodyPr wrap="square" lIns="0" tIns="0" rIns="0" bIns="0" rtlCol="0" anchor="ctr"/>
           <a:lstStyle/>
           <a:p>
-            <a:pPr algn="ctr" indent="0" marL="0">
+            <a:pPr marL="0" indent="0" algn="ctr">
               <a:buNone/>
             </a:pPr>
             <a:r>
@@ -7929,7 +8146,7 @@
           <a:bodyPr wrap="square" lIns="0" tIns="0" rIns="0" bIns="0" rtlCol="0" anchor="t"/>
           <a:lstStyle/>
           <a:p>
-            <a:pPr algn="ctr" indent="0" marL="0">
+            <a:pPr marL="0" indent="0" algn="ctr">
               <a:buNone/>
             </a:pPr>
             <a:r>
@@ -7967,6 +8184,13 @@
             <a:tailEnd type="triangle"/>
           </a:ln>
         </p:spPr>
+        <p:txBody>
+          <a:bodyPr/>
+          <a:lstStyle/>
+          <a:p>
+            <a:endParaRPr lang="en-US"/>
+          </a:p>
+        </p:txBody>
       </p:sp>
       <p:sp>
         <p:nvSpPr>
@@ -7994,17 +8218,24 @@
             <a:prstDash val="solid"/>
           </a:ln>
         </p:spPr>
+        <p:txBody>
+          <a:bodyPr/>
+          <a:lstStyle/>
+          <a:p>
+            <a:endParaRPr lang="en-US"/>
+          </a:p>
+        </p:txBody>
       </p:sp>
       <p:pic>
         <p:nvPicPr>
-          <p:cNvPr id="9" name="Image 1" descr="preencoded.png">    </p:cNvPr>
+          <p:cNvPr id="9" name="Image 1" descr="preencoded.png"/>
           <p:cNvPicPr>
             <a:picLocks noChangeAspect="1"/>
           </p:cNvPicPr>
           <p:nvPr/>
         </p:nvPicPr>
         <p:blipFill>
-          <a:blip r:embed="rId2"/>
+          <a:blip r:embed="rId4"/>
           <a:stretch>
             <a:fillRect/>
           </a:stretch>
@@ -8040,7 +8271,7 @@
           <a:bodyPr wrap="square" lIns="0" tIns="0" rIns="0" bIns="0" rtlCol="0" anchor="ctr"/>
           <a:lstStyle/>
           <a:p>
-            <a:pPr algn="ctr" indent="0" marL="0">
+            <a:pPr marL="0" indent="0" algn="ctr">
               <a:buNone/>
             </a:pPr>
             <a:r>
@@ -8076,7 +8307,7 @@
           <a:bodyPr wrap="square" lIns="0" tIns="0" rIns="0" bIns="0" rtlCol="0" anchor="t"/>
           <a:lstStyle/>
           <a:p>
-            <a:pPr algn="ctr" indent="0" marL="0">
+            <a:pPr marL="0" indent="0" algn="ctr">
               <a:buNone/>
             </a:pPr>
             <a:r>
@@ -8114,6 +8345,13 @@
             <a:tailEnd type="triangle"/>
           </a:ln>
         </p:spPr>
+        <p:txBody>
+          <a:bodyPr/>
+          <a:lstStyle/>
+          <a:p>
+            <a:endParaRPr lang="en-US"/>
+          </a:p>
+        </p:txBody>
       </p:sp>
       <p:sp>
         <p:nvSpPr>
@@ -8141,17 +8379,24 @@
             <a:prstDash val="solid"/>
           </a:ln>
         </p:spPr>
+        <p:txBody>
+          <a:bodyPr/>
+          <a:lstStyle/>
+          <a:p>
+            <a:endParaRPr lang="en-US"/>
+          </a:p>
+        </p:txBody>
       </p:sp>
       <p:pic>
         <p:nvPicPr>
-          <p:cNvPr id="14" name="Image 2" descr="preencoded.png">    </p:cNvPr>
+          <p:cNvPr id="14" name="Image 2" descr="preencoded.png"/>
           <p:cNvPicPr>
             <a:picLocks noChangeAspect="1"/>
           </p:cNvPicPr>
           <p:nvPr/>
         </p:nvPicPr>
         <p:blipFill>
-          <a:blip r:embed="rId3"/>
+          <a:blip r:embed="rId5"/>
           <a:stretch>
             <a:fillRect/>
           </a:stretch>
@@ -8187,7 +8432,7 @@
           <a:bodyPr wrap="square" lIns="0" tIns="0" rIns="0" bIns="0" rtlCol="0" anchor="ctr"/>
           <a:lstStyle/>
           <a:p>
-            <a:pPr algn="ctr" indent="0" marL="0">
+            <a:pPr marL="0" indent="0" algn="ctr">
               <a:buNone/>
             </a:pPr>
             <a:r>
@@ -8223,7 +8468,7 @@
           <a:bodyPr wrap="square" lIns="0" tIns="0" rIns="0" bIns="0" rtlCol="0" anchor="t"/>
           <a:lstStyle/>
           <a:p>
-            <a:pPr algn="ctr" indent="0" marL="0">
+            <a:pPr marL="0" indent="0" algn="ctr">
               <a:buNone/>
             </a:pPr>
             <a:r>
@@ -8261,6 +8506,13 @@
             <a:tailEnd type="triangle"/>
           </a:ln>
         </p:spPr>
+        <p:txBody>
+          <a:bodyPr/>
+          <a:lstStyle/>
+          <a:p>
+            <a:endParaRPr lang="en-US"/>
+          </a:p>
+        </p:txBody>
       </p:sp>
       <p:sp>
         <p:nvSpPr>
@@ -8288,17 +8540,24 @@
             <a:prstDash val="solid"/>
           </a:ln>
         </p:spPr>
+        <p:txBody>
+          <a:bodyPr/>
+          <a:lstStyle/>
+          <a:p>
+            <a:endParaRPr lang="en-US"/>
+          </a:p>
+        </p:txBody>
       </p:sp>
       <p:pic>
         <p:nvPicPr>
-          <p:cNvPr id="19" name="Image 3" descr="preencoded.png">    </p:cNvPr>
+          <p:cNvPr id="19" name="Image 3" descr="preencoded.png"/>
           <p:cNvPicPr>
             <a:picLocks noChangeAspect="1"/>
           </p:cNvPicPr>
           <p:nvPr/>
         </p:nvPicPr>
         <p:blipFill>
-          <a:blip r:embed="rId4"/>
+          <a:blip r:embed="rId6"/>
           <a:stretch>
             <a:fillRect/>
           </a:stretch>
@@ -8334,7 +8593,7 @@
           <a:bodyPr wrap="square" lIns="0" tIns="0" rIns="0" bIns="0" rtlCol="0" anchor="ctr"/>
           <a:lstStyle/>
           <a:p>
-            <a:pPr algn="ctr" indent="0" marL="0">
+            <a:pPr marL="0" indent="0" algn="ctr">
               <a:buNone/>
             </a:pPr>
             <a:r>
@@ -8370,7 +8629,7 @@
           <a:bodyPr wrap="square" lIns="0" tIns="0" rIns="0" bIns="0" rtlCol="0" anchor="t"/>
           <a:lstStyle/>
           <a:p>
-            <a:pPr algn="ctr" indent="0" marL="0">
+            <a:pPr marL="0" indent="0" algn="ctr">
               <a:buNone/>
             </a:pPr>
             <a:r>
@@ -8408,6 +8667,13 @@
             <a:tailEnd type="triangle"/>
           </a:ln>
         </p:spPr>
+        <p:txBody>
+          <a:bodyPr/>
+          <a:lstStyle/>
+          <a:p>
+            <a:endParaRPr lang="en-US"/>
+          </a:p>
+        </p:txBody>
       </p:sp>
       <p:sp>
         <p:nvSpPr>
@@ -8435,17 +8701,24 @@
             <a:prstDash val="solid"/>
           </a:ln>
         </p:spPr>
+        <p:txBody>
+          <a:bodyPr/>
+          <a:lstStyle/>
+          <a:p>
+            <a:endParaRPr lang="en-US"/>
+          </a:p>
+        </p:txBody>
       </p:sp>
       <p:pic>
         <p:nvPicPr>
-          <p:cNvPr id="24" name="Image 4" descr="preencoded.png">    </p:cNvPr>
+          <p:cNvPr id="24" name="Image 4" descr="preencoded.png"/>
           <p:cNvPicPr>
             <a:picLocks noChangeAspect="1"/>
           </p:cNvPicPr>
           <p:nvPr/>
         </p:nvPicPr>
         <p:blipFill>
-          <a:blip r:embed="rId5"/>
+          <a:blip r:embed="rId7"/>
           <a:stretch>
             <a:fillRect/>
           </a:stretch>
@@ -8481,7 +8754,7 @@
           <a:bodyPr wrap="square" lIns="0" tIns="0" rIns="0" bIns="0" rtlCol="0" anchor="ctr"/>
           <a:lstStyle/>
           <a:p>
-            <a:pPr algn="ctr" indent="0" marL="0">
+            <a:pPr marL="0" indent="0" algn="ctr">
               <a:buNone/>
             </a:pPr>
             <a:r>
@@ -8517,7 +8790,7 @@
           <a:bodyPr wrap="square" lIns="0" tIns="0" rIns="0" bIns="0" rtlCol="0" anchor="t"/>
           <a:lstStyle/>
           <a:p>
-            <a:pPr algn="ctr" indent="0" marL="0">
+            <a:pPr marL="0" indent="0" algn="ctr">
               <a:buNone/>
             </a:pPr>
             <a:r>
@@ -8555,6 +8828,13 @@
             <a:tailEnd type="triangle"/>
           </a:ln>
         </p:spPr>
+        <p:txBody>
+          <a:bodyPr/>
+          <a:lstStyle/>
+          <a:p>
+            <a:endParaRPr lang="en-US"/>
+          </a:p>
+        </p:txBody>
       </p:sp>
       <p:sp>
         <p:nvSpPr>
@@ -8582,17 +8862,24 @@
             <a:prstDash val="solid"/>
           </a:ln>
         </p:spPr>
+        <p:txBody>
+          <a:bodyPr/>
+          <a:lstStyle/>
+          <a:p>
+            <a:endParaRPr lang="en-US"/>
+          </a:p>
+        </p:txBody>
       </p:sp>
       <p:pic>
         <p:nvPicPr>
-          <p:cNvPr id="29" name="Image 5" descr="preencoded.png">    </p:cNvPr>
+          <p:cNvPr id="29" name="Image 5" descr="preencoded.png"/>
           <p:cNvPicPr>
             <a:picLocks noChangeAspect="1"/>
           </p:cNvPicPr>
           <p:nvPr/>
         </p:nvPicPr>
         <p:blipFill>
-          <a:blip r:embed="rId6"/>
+          <a:blip r:embed="rId8"/>
           <a:stretch>
             <a:fillRect/>
           </a:stretch>
@@ -8628,7 +8915,7 @@
           <a:bodyPr wrap="square" lIns="0" tIns="0" rIns="0" bIns="0" rtlCol="0" anchor="ctr"/>
           <a:lstStyle/>
           <a:p>
-            <a:pPr algn="ctr" indent="0" marL="0">
+            <a:pPr marL="0" indent="0" algn="ctr">
               <a:buNone/>
             </a:pPr>
             <a:r>
@@ -8664,7 +8951,7 @@
           <a:bodyPr wrap="square" lIns="0" tIns="0" rIns="0" bIns="0" rtlCol="0" anchor="t"/>
           <a:lstStyle/>
           <a:p>
-            <a:pPr algn="ctr" indent="0" marL="0">
+            <a:pPr marL="0" indent="0" algn="ctr">
               <a:buNone/>
             </a:pPr>
             <a:r>
@@ -8702,6 +8989,13 @@
             <a:tailEnd type="triangle"/>
           </a:ln>
         </p:spPr>
+        <p:txBody>
+          <a:bodyPr/>
+          <a:lstStyle/>
+          <a:p>
+            <a:endParaRPr lang="en-US"/>
+          </a:p>
+        </p:txBody>
       </p:sp>
       <p:sp>
         <p:nvSpPr>
@@ -8729,17 +9023,24 @@
             <a:prstDash val="solid"/>
           </a:ln>
         </p:spPr>
+        <p:txBody>
+          <a:bodyPr/>
+          <a:lstStyle/>
+          <a:p>
+            <a:endParaRPr lang="en-US"/>
+          </a:p>
+        </p:txBody>
       </p:sp>
       <p:pic>
         <p:nvPicPr>
-          <p:cNvPr id="34" name="Image 6" descr="preencoded.png">    </p:cNvPr>
+          <p:cNvPr id="34" name="Image 6" descr="preencoded.png"/>
           <p:cNvPicPr>
             <a:picLocks noChangeAspect="1"/>
           </p:cNvPicPr>
           <p:nvPr/>
         </p:nvPicPr>
         <p:blipFill>
-          <a:blip r:embed="rId7"/>
+          <a:blip r:embed="rId9"/>
           <a:stretch>
             <a:fillRect/>
           </a:stretch>
@@ -8775,7 +9076,7 @@
           <a:bodyPr wrap="square" lIns="0" tIns="0" rIns="0" bIns="0" rtlCol="0" anchor="ctr"/>
           <a:lstStyle/>
           <a:p>
-            <a:pPr algn="ctr" indent="0" marL="0">
+            <a:pPr marL="0" indent="0" algn="ctr">
               <a:buNone/>
             </a:pPr>
             <a:r>
@@ -8811,7 +9112,7 @@
           <a:bodyPr wrap="square" lIns="0" tIns="0" rIns="0" bIns="0" rtlCol="0" anchor="t"/>
           <a:lstStyle/>
           <a:p>
-            <a:pPr algn="ctr" indent="0" marL="0">
+            <a:pPr marL="0" indent="0" algn="ctr">
               <a:buNone/>
             </a:pPr>
             <a:r>
@@ -8849,6 +9150,13 @@
             <a:tailEnd type="triangle"/>
           </a:ln>
         </p:spPr>
+        <p:txBody>
+          <a:bodyPr/>
+          <a:lstStyle/>
+          <a:p>
+            <a:endParaRPr lang="en-US"/>
+          </a:p>
+        </p:txBody>
       </p:sp>
       <p:sp>
         <p:nvSpPr>
@@ -8876,17 +9184,24 @@
             <a:prstDash val="solid"/>
           </a:ln>
         </p:spPr>
+        <p:txBody>
+          <a:bodyPr/>
+          <a:lstStyle/>
+          <a:p>
+            <a:endParaRPr lang="en-US"/>
+          </a:p>
+        </p:txBody>
       </p:sp>
       <p:pic>
         <p:nvPicPr>
-          <p:cNvPr id="39" name="Image 7" descr="preencoded.png">    </p:cNvPr>
+          <p:cNvPr id="39" name="Image 7" descr="preencoded.png"/>
           <p:cNvPicPr>
             <a:picLocks noChangeAspect="1"/>
           </p:cNvPicPr>
           <p:nvPr/>
         </p:nvPicPr>
         <p:blipFill>
-          <a:blip r:embed="rId8"/>
+          <a:blip r:embed="rId10"/>
           <a:stretch>
             <a:fillRect/>
           </a:stretch>
@@ -8922,7 +9237,7 @@
           <a:bodyPr wrap="square" lIns="0" tIns="0" rIns="0" bIns="0" rtlCol="0" anchor="ctr"/>
           <a:lstStyle/>
           <a:p>
-            <a:pPr algn="ctr" indent="0" marL="0">
+            <a:pPr marL="0" indent="0" algn="ctr">
               <a:buNone/>
             </a:pPr>
             <a:r>
@@ -8958,7 +9273,7 @@
           <a:bodyPr wrap="square" lIns="0" tIns="0" rIns="0" bIns="0" rtlCol="0" anchor="t"/>
           <a:lstStyle/>
           <a:p>
-            <a:pPr algn="ctr" indent="0" marL="0">
+            <a:pPr marL="0" indent="0" algn="ctr">
               <a:buNone/>
             </a:pPr>
             <a:r>
@@ -8996,6 +9311,13 @@
             <a:tailEnd type="triangle"/>
           </a:ln>
         </p:spPr>
+        <p:txBody>
+          <a:bodyPr/>
+          <a:lstStyle/>
+          <a:p>
+            <a:endParaRPr lang="en-US"/>
+          </a:p>
+        </p:txBody>
       </p:sp>
       <p:sp>
         <p:nvSpPr>
@@ -9020,6 +9342,13 @@
             <a:tailEnd type="triangle"/>
           </a:ln>
         </p:spPr>
+        <p:txBody>
+          <a:bodyPr/>
+          <a:lstStyle/>
+          <a:p>
+            <a:endParaRPr lang="en-US"/>
+          </a:p>
+        </p:txBody>
       </p:sp>
       <p:sp>
         <p:nvSpPr>
@@ -9044,6 +9373,13 @@
             <a:tailEnd type="triangle"/>
           </a:ln>
         </p:spPr>
+        <p:txBody>
+          <a:bodyPr/>
+          <a:lstStyle/>
+          <a:p>
+            <a:endParaRPr lang="en-US"/>
+          </a:p>
+        </p:txBody>
       </p:sp>
       <p:sp>
         <p:nvSpPr>
@@ -9066,7 +9402,7 @@
           <a:bodyPr wrap="square" lIns="0" tIns="0" rIns="0" bIns="0" rtlCol="0" anchor="t"/>
           <a:lstStyle/>
           <a:p>
-            <a:pPr indent="0" marL="0">
+            <a:pPr marL="0" indent="0">
               <a:buNone/>
             </a:pPr>
             <a:r>
@@ -9102,7 +9438,7 @@
           <a:bodyPr wrap="square" lIns="0" tIns="0" rIns="0" bIns="0" rtlCol="0" anchor="t"/>
           <a:lstStyle/>
           <a:p>
-            <a:pPr indent="0" marL="0">
+            <a:pPr marL="0" indent="0">
               <a:buNone/>
             </a:pPr>
             <a:r>
@@ -9138,7 +9474,7 @@
           <a:bodyPr wrap="square" lIns="0" tIns="0" rIns="0" bIns="0" rtlCol="0" anchor="t"/>
           <a:lstStyle/>
           <a:p>
-            <a:pPr indent="0" marL="0">
+            <a:pPr marL="0" indent="0">
               <a:buNone/>
             </a:pPr>
             <a:r>
@@ -9179,6 +9515,13 @@
             <a:prstDash val="solid"/>
           </a:ln>
         </p:spPr>
+        <p:txBody>
+          <a:bodyPr/>
+          <a:lstStyle/>
+          <a:p>
+            <a:endParaRPr lang="en-US"/>
+          </a:p>
+        </p:txBody>
       </p:sp>
       <p:sp>
         <p:nvSpPr>
@@ -9201,7 +9544,7 @@
           <a:bodyPr wrap="square" lIns="0" tIns="0" rIns="0" bIns="0" rtlCol="0" anchor="ctr"/>
           <a:lstStyle/>
           <a:p>
-            <a:pPr algn="ctr" indent="0" marL="0">
+            <a:pPr marL="0" indent="0" algn="ctr">
               <a:buNone/>
             </a:pPr>
             <a:r>
@@ -9242,6 +9585,13 @@
             <a:prstDash val="solid"/>
           </a:ln>
         </p:spPr>
+        <p:txBody>
+          <a:bodyPr/>
+          <a:lstStyle/>
+          <a:p>
+            <a:endParaRPr lang="en-US"/>
+          </a:p>
+        </p:txBody>
       </p:sp>
       <p:sp>
         <p:nvSpPr>
@@ -9264,7 +9614,7 @@
           <a:bodyPr wrap="square" lIns="0" tIns="0" rIns="0" bIns="0" rtlCol="0" anchor="ctr"/>
           <a:lstStyle/>
           <a:p>
-            <a:pPr algn="ctr" indent="0" marL="0">
+            <a:pPr marL="0" indent="0" algn="ctr">
               <a:buNone/>
             </a:pPr>
             <a:r>
@@ -9300,7 +9650,7 @@
           <a:bodyPr wrap="square" lIns="0" tIns="0" rIns="0" bIns="0" rtlCol="0" anchor="t"/>
           <a:lstStyle/>
           <a:p>
-            <a:pPr indent="0" marL="0">
+            <a:pPr marL="0" indent="0">
               <a:buNone/>
             </a:pPr>
             <a:r>
@@ -9341,6 +9691,13 @@
             <a:prstDash val="solid"/>
           </a:ln>
         </p:spPr>
+        <p:txBody>
+          <a:bodyPr/>
+          <a:lstStyle/>
+          <a:p>
+            <a:endParaRPr lang="en-US"/>
+          </a:p>
+        </p:txBody>
       </p:sp>
       <p:sp>
         <p:nvSpPr>
@@ -9363,7 +9720,7 @@
           <a:bodyPr wrap="square" lIns="0" tIns="0" rIns="0" bIns="0" rtlCol="0" anchor="ctr"/>
           <a:lstStyle/>
           <a:p>
-            <a:pPr indent="0" marL="0">
+            <a:pPr marL="0" indent="0">
               <a:buNone/>
             </a:pPr>
             <a:r>
@@ -9374,9 +9731,6 @@
               </a:rPr>
               <a:t>One code path. </a:t>
             </a:r>
-            <a:pPr indent="0" marL="0">
-              <a:buNone/>
-            </a:pPr>
             <a:r>
               <a:rPr lang="en-US" sz="1300" dirty="0">
                 <a:solidFill>
@@ -9391,7 +9745,7 @@
       </p:sp>
       <p:sp>
         <p:nvSpPr>
-          <p:cNvPr id="25" name="Slide Number Placeholder 0"/>
+          <p:cNvPr id="55" name="Slide Number Placeholder 0"/>
           <p:cNvSpPr>
             <a:spLocks noGrp="1"/>
           </p:cNvSpPr>
@@ -9409,7 +9763,7 @@
           </a:prstGeom>
           <a:extLst>
             <a:ext uri="{C572A759-6A51-4108-AA02-DFA0A04FC94B}">
-              <ma14:wrappingTextBoxFlag xmlns:ma14="http://schemas.microsoft.com/office/mac/drawingml/2011/main" val="0"/>
+              <ma14:wrappingTextBoxFlag xmlns:ma14="http://schemas.microsoft.com/office/mac/drawingml/2011/main" xmlns="" val="0"/>
             </a:ext>
           </a:extLst>
         </p:spPr>
@@ -9427,7 +9781,7 @@
           <a:p>
             <a:pPr algn="r"/>
             <a:fld id="{F7021451-1387-4CA6-816F-3879F97B5CBC}" type="slidenum">
-              <a:rPr b="0" lang="en-US"/>
+              <a:rPr lang="en-US" b="0"/>
               <a:t>4</a:t>
             </a:fld>
             <a:endParaRPr lang="en-US"/>
@@ -9462,9 +9816,11 @@
       <p:sp>
         <p:nvSpPr>
           <p:cNvPr id="2" name="Text 0"/>
-          <p:cNvSpPr/>
+          <p:cNvSpPr>
+            <a:spLocks noGrp="1"/>
+          </p:cNvSpPr>
           <p:nvPr>
-            <p:ph idx="100" type="title" hasCustomPrompt="1"/>
+            <p:ph type="title" idx="100" hasCustomPrompt="1"/>
           </p:nvPr>
         </p:nvSpPr>
         <p:spPr>
@@ -9482,7 +9838,7 @@
           <a:bodyPr wrap="square" lIns="0" tIns="0" rIns="0" bIns="0" rtlCol="0" anchor="ctr"/>
           <a:lstStyle/>
           <a:p>
-            <a:pPr algn="l" indent="0" marL="0">
+            <a:pPr marL="0" indent="0" algn="l">
               <a:buNone/>
             </a:pPr>
             <a:r>
@@ -9521,6 +9877,13 @@
             <a:prstDash val="solid"/>
           </a:ln>
         </p:spPr>
+        <p:txBody>
+          <a:bodyPr/>
+          <a:lstStyle/>
+          <a:p>
+            <a:endParaRPr lang="en-US"/>
+          </a:p>
+        </p:txBody>
       </p:sp>
       <p:sp>
         <p:nvSpPr>
@@ -9543,7 +9906,7 @@
           <a:bodyPr wrap="square" lIns="0" tIns="0" rIns="0" bIns="0" rtlCol="0" anchor="ctr"/>
           <a:lstStyle/>
           <a:p>
-            <a:pPr algn="ctr" indent="0" marL="0">
+            <a:pPr marL="0" indent="0" algn="ctr">
               <a:buNone/>
             </a:pPr>
             <a:r>
@@ -9581,6 +9944,13 @@
             <a:tailEnd type="triangle"/>
           </a:ln>
         </p:spPr>
+        <p:txBody>
+          <a:bodyPr/>
+          <a:lstStyle/>
+          <a:p>
+            <a:endParaRPr lang="en-US"/>
+          </a:p>
+        </p:txBody>
       </p:sp>
       <p:sp>
         <p:nvSpPr>
@@ -9603,7 +9973,7 @@
           <a:bodyPr wrap="square" lIns="0" tIns="0" rIns="0" bIns="0" rtlCol="0" anchor="t"/>
           <a:lstStyle/>
           <a:p>
-            <a:pPr indent="0" marL="0">
+            <a:pPr marL="0" indent="0">
               <a:buNone/>
             </a:pPr>
             <a:r>
@@ -9639,7 +10009,7 @@
           <a:bodyPr wrap="square" lIns="0" tIns="0" rIns="0" bIns="0" rtlCol="0" anchor="t"/>
           <a:lstStyle/>
           <a:p>
-            <a:pPr indent="0" marL="0">
+            <a:pPr marL="0" indent="0">
               <a:buNone/>
             </a:pPr>
             <a:r>
@@ -9678,6 +10048,13 @@
             <a:prstDash val="solid"/>
           </a:ln>
         </p:spPr>
+        <p:txBody>
+          <a:bodyPr/>
+          <a:lstStyle/>
+          <a:p>
+            <a:endParaRPr lang="en-US"/>
+          </a:p>
+        </p:txBody>
       </p:sp>
       <p:sp>
         <p:nvSpPr>
@@ -9700,7 +10077,7 @@
           <a:bodyPr wrap="square" lIns="0" tIns="0" rIns="0" bIns="0" rtlCol="0" anchor="ctr"/>
           <a:lstStyle/>
           <a:p>
-            <a:pPr algn="ctr" indent="0" marL="0">
+            <a:pPr marL="0" indent="0" algn="ctr">
               <a:buNone/>
             </a:pPr>
             <a:r>
@@ -9738,6 +10115,13 @@
             <a:tailEnd type="triangle"/>
           </a:ln>
         </p:spPr>
+        <p:txBody>
+          <a:bodyPr/>
+          <a:lstStyle/>
+          <a:p>
+            <a:endParaRPr lang="en-US"/>
+          </a:p>
+        </p:txBody>
       </p:sp>
       <p:sp>
         <p:nvSpPr>
@@ -9760,7 +10144,7 @@
           <a:bodyPr wrap="square" lIns="0" tIns="0" rIns="0" bIns="0" rtlCol="0" anchor="t"/>
           <a:lstStyle/>
           <a:p>
-            <a:pPr indent="0" marL="0">
+            <a:pPr marL="0" indent="0">
               <a:buNone/>
             </a:pPr>
             <a:r>
@@ -9796,7 +10180,7 @@
           <a:bodyPr wrap="square" lIns="0" tIns="0" rIns="0" bIns="0" rtlCol="0" anchor="t"/>
           <a:lstStyle/>
           <a:p>
-            <a:pPr indent="0" marL="0">
+            <a:pPr marL="0" indent="0">
               <a:buNone/>
             </a:pPr>
             <a:r>
@@ -9835,6 +10219,13 @@
             <a:prstDash val="solid"/>
           </a:ln>
         </p:spPr>
+        <p:txBody>
+          <a:bodyPr/>
+          <a:lstStyle/>
+          <a:p>
+            <a:endParaRPr lang="en-US"/>
+          </a:p>
+        </p:txBody>
       </p:sp>
       <p:sp>
         <p:nvSpPr>
@@ -9857,7 +10248,7 @@
           <a:bodyPr wrap="square" lIns="0" tIns="0" rIns="0" bIns="0" rtlCol="0" anchor="ctr"/>
           <a:lstStyle/>
           <a:p>
-            <a:pPr algn="ctr" indent="0" marL="0">
+            <a:pPr marL="0" indent="0" algn="ctr">
               <a:buNone/>
             </a:pPr>
             <a:r>
@@ -9895,6 +10286,13 @@
             <a:tailEnd type="triangle"/>
           </a:ln>
         </p:spPr>
+        <p:txBody>
+          <a:bodyPr/>
+          <a:lstStyle/>
+          <a:p>
+            <a:endParaRPr lang="en-US"/>
+          </a:p>
+        </p:txBody>
       </p:sp>
       <p:sp>
         <p:nvSpPr>
@@ -9917,7 +10315,7 @@
           <a:bodyPr wrap="square" lIns="0" tIns="0" rIns="0" bIns="0" rtlCol="0" anchor="t"/>
           <a:lstStyle/>
           <a:p>
-            <a:pPr indent="0" marL="0">
+            <a:pPr marL="0" indent="0">
               <a:buNone/>
             </a:pPr>
             <a:r>
@@ -9953,7 +10351,7 @@
           <a:bodyPr wrap="square" lIns="0" tIns="0" rIns="0" bIns="0" rtlCol="0" anchor="t"/>
           <a:lstStyle/>
           <a:p>
-            <a:pPr indent="0" marL="0">
+            <a:pPr marL="0" indent="0">
               <a:buNone/>
             </a:pPr>
             <a:r>
@@ -9992,6 +10390,13 @@
             <a:prstDash val="solid"/>
           </a:ln>
         </p:spPr>
+        <p:txBody>
+          <a:bodyPr/>
+          <a:lstStyle/>
+          <a:p>
+            <a:endParaRPr lang="en-US"/>
+          </a:p>
+        </p:txBody>
       </p:sp>
       <p:sp>
         <p:nvSpPr>
@@ -10014,7 +10419,7 @@
           <a:bodyPr wrap="square" lIns="0" tIns="0" rIns="0" bIns="0" rtlCol="0" anchor="ctr"/>
           <a:lstStyle/>
           <a:p>
-            <a:pPr algn="ctr" indent="0" marL="0">
+            <a:pPr marL="0" indent="0" algn="ctr">
               <a:buNone/>
             </a:pPr>
             <a:r>
@@ -10050,7 +10455,7 @@
           <a:bodyPr wrap="square" lIns="0" tIns="0" rIns="0" bIns="0" rtlCol="0" anchor="t"/>
           <a:lstStyle/>
           <a:p>
-            <a:pPr indent="0" marL="0">
+            <a:pPr marL="0" indent="0">
               <a:buNone/>
             </a:pPr>
             <a:r>
@@ -10086,7 +10491,7 @@
           <a:bodyPr wrap="square" lIns="0" tIns="0" rIns="0" bIns="0" rtlCol="0" anchor="t"/>
           <a:lstStyle/>
           <a:p>
-            <a:pPr indent="0" marL="0">
+            <a:pPr marL="0" indent="0">
               <a:buNone/>
             </a:pPr>
             <a:r>
@@ -10098,93 +10503,6 @@
               <a:t>The dashboard reads the same evaluation file used in this deck: before/after, ablation, failure log.</a:t>
             </a:r>
             <a:endParaRPr lang="en-US" sz="1400" dirty="0"/>
-          </a:p>
-        </p:txBody>
-      </p:sp>
-      <p:sp>
-        <p:nvSpPr>
-          <p:cNvPr id="22" name="Shape 20"/>
-          <p:cNvSpPr/>
-          <p:nvPr/>
-        </p:nvSpPr>
-        <p:spPr>
-          <a:xfrm>
-            <a:off x="548640" y="4572000"/>
-            <a:ext cx="11064240" cy="822960"/>
-          </a:xfrm>
-          <a:prstGeom prst="roundRect">
-            <a:avLst>
-              <a:gd name="adj" fmla="val 8889"/>
-            </a:avLst>
-          </a:prstGeom>
-          <a:solidFill>
-            <a:schemeClr val="bg2"/>
-          </a:solidFill>
-          <a:ln w="12700">
-            <a:solidFill>
-              <a:schemeClr val="bg2"/>
-            </a:solidFill>
-            <a:prstDash val="solid"/>
-          </a:ln>
-        </p:spPr>
-      </p:sp>
-      <p:pic>
-        <p:nvPicPr>
-          <p:cNvPr id="23" name="Image 0" descr="preencoded.png">    </p:cNvPr>
-          <p:cNvPicPr>
-            <a:picLocks noChangeAspect="1"/>
-          </p:cNvPicPr>
-          <p:nvPr/>
-        </p:nvPicPr>
-        <p:blipFill>
-          <a:blip r:embed="rId1"/>
-          <a:stretch>
-            <a:fillRect/>
-          </a:stretch>
-        </p:blipFill>
-        <p:spPr>
-          <a:xfrm>
-            <a:off x="777240" y="4773168"/>
-            <a:ext cx="411480" cy="411480"/>
-          </a:xfrm>
-          <a:prstGeom prst="rect">
-            <a:avLst/>
-          </a:prstGeom>
-        </p:spPr>
-      </p:pic>
-      <p:sp>
-        <p:nvSpPr>
-          <p:cNvPr id="24" name="Text 21"/>
-          <p:cNvSpPr txBox="1"/>
-          <p:nvPr/>
-        </p:nvSpPr>
-        <p:spPr>
-          <a:xfrm>
-            <a:off x="1371600" y="4572000"/>
-            <a:ext cx="10058400" cy="822960"/>
-          </a:xfrm>
-          <a:prstGeom prst="rect">
-            <a:avLst/>
-          </a:prstGeom>
-          <a:noFill/>
-          <a:ln/>
-        </p:spPr>
-        <p:txBody>
-          <a:bodyPr wrap="square" lIns="0" tIns="0" rIns="0" bIns="0" rtlCol="0" anchor="ctr"/>
-          <a:lstStyle/>
-          <a:p>
-            <a:pPr indent="0" marL="0">
-              <a:buNone/>
-            </a:pPr>
-            <a:r>
-              <a:rPr lang="en-US" sz="1500" dirty="0">
-                <a:solidFill>
-                  <a:schemeClr val="tx2"/>
-                </a:solidFill>
-              </a:rPr>
-              <a:t>Backup: a recorded walkthrough of the same four steps is ready if the network fails.</a:t>
-            </a:r>
-            <a:endParaRPr lang="en-US" sz="1500" dirty="0"/>
           </a:p>
         </p:txBody>
       </p:sp>
@@ -10208,7 +10526,7 @@
           </a:prstGeom>
           <a:extLst>
             <a:ext uri="{C572A759-6A51-4108-AA02-DFA0A04FC94B}">
-              <ma14:wrappingTextBoxFlag xmlns:ma14="http://schemas.microsoft.com/office/mac/drawingml/2011/main" val="0"/>
+              <ma14:wrappingTextBoxFlag xmlns:ma14="http://schemas.microsoft.com/office/mac/drawingml/2011/main" xmlns="" val="0"/>
             </a:ext>
           </a:extLst>
         </p:spPr>
@@ -10226,7 +10544,7 @@
           <a:p>
             <a:pPr algn="r"/>
             <a:fld id="{F7021451-1387-4CA6-816F-3879F97B5CBC}" type="slidenum">
-              <a:rPr b="0" lang="en-US"/>
+              <a:rPr lang="en-US" b="0"/>
               <a:t>5</a:t>
             </a:fld>
             <a:endParaRPr lang="en-US"/>
@@ -10261,9 +10579,11 @@
       <p:sp>
         <p:nvSpPr>
           <p:cNvPr id="2" name="Text 0"/>
-          <p:cNvSpPr/>
+          <p:cNvSpPr>
+            <a:spLocks noGrp="1"/>
+          </p:cNvSpPr>
           <p:nvPr>
-            <p:ph idx="100" type="title" hasCustomPrompt="1"/>
+            <p:ph type="title" idx="100" hasCustomPrompt="1"/>
           </p:nvPr>
         </p:nvSpPr>
         <p:spPr>
@@ -10281,7 +10601,7 @@
           <a:bodyPr wrap="square" lIns="0" tIns="0" rIns="0" bIns="0" rtlCol="0" anchor="ctr"/>
           <a:lstStyle/>
           <a:p>
-            <a:pPr algn="l" indent="0" marL="0">
+            <a:pPr marL="0" indent="0" algn="l">
               <a:buNone/>
             </a:pPr>
             <a:r>
@@ -10317,7 +10637,7 @@
           <a:bodyPr wrap="square" lIns="0" tIns="0" rIns="0" bIns="0" rtlCol="0" anchor="t"/>
           <a:lstStyle/>
           <a:p>
-            <a:pPr indent="0" marL="0">
+            <a:pPr marL="0" indent="0">
               <a:buNone/>
             </a:pPr>
             <a:r>
@@ -10356,7 +10676,7 @@
           <a:bodyPr wrap="square" lIns="0" tIns="0" rIns="0" bIns="0" rtlCol="0" anchor="t"/>
           <a:lstStyle/>
           <a:p>
-            <a:pPr indent="0" marL="0">
+            <a:pPr marL="0" indent="0">
               <a:buNone/>
             </a:pPr>
             <a:r>
@@ -10392,7 +10712,7 @@
           <a:bodyPr wrap="square" lIns="0" tIns="0" rIns="0" bIns="0" rtlCol="0" anchor="t"/>
           <a:lstStyle/>
           <a:p>
-            <a:pPr indent="0" marL="0">
+            <a:pPr marL="0" indent="0">
               <a:buNone/>
             </a:pPr>
             <a:r>
@@ -10428,7 +10748,7 @@
           <a:bodyPr wrap="square" lIns="0" tIns="0" rIns="0" bIns="0" rtlCol="0" anchor="t"/>
           <a:lstStyle/>
           <a:p>
-            <a:pPr indent="0" marL="0">
+            <a:pPr marL="0" indent="0">
               <a:buNone/>
             </a:pPr>
             <a:r>
@@ -10467,7 +10787,7 @@
           <a:bodyPr wrap="square" lIns="0" tIns="0" rIns="0" bIns="0" rtlCol="0" anchor="t"/>
           <a:lstStyle/>
           <a:p>
-            <a:pPr indent="0" marL="0">
+            <a:pPr marL="0" indent="0">
               <a:buNone/>
             </a:pPr>
             <a:r>
@@ -10503,7 +10823,7 @@
           <a:bodyPr wrap="square" lIns="0" tIns="0" rIns="0" bIns="0" rtlCol="0" anchor="t"/>
           <a:lstStyle/>
           <a:p>
-            <a:pPr indent="0" marL="0">
+            <a:pPr marL="0" indent="0">
               <a:buNone/>
             </a:pPr>
             <a:r>
@@ -10539,7 +10859,7 @@
           <a:bodyPr wrap="square" lIns="0" tIns="0" rIns="0" bIns="0" rtlCol="0" anchor="t"/>
           <a:lstStyle/>
           <a:p>
-            <a:pPr indent="0" marL="0">
+            <a:pPr marL="0" indent="0">
               <a:buNone/>
             </a:pPr>
             <a:r>
@@ -10578,7 +10898,7 @@
           <a:bodyPr wrap="square" lIns="0" tIns="0" rIns="0" bIns="0" rtlCol="0" anchor="t"/>
           <a:lstStyle/>
           <a:p>
-            <a:pPr indent="0" marL="0">
+            <a:pPr marL="0" indent="0">
               <a:buNone/>
             </a:pPr>
             <a:r>
@@ -10614,7 +10934,7 @@
           <a:bodyPr wrap="square" lIns="0" tIns="0" rIns="0" bIns="0" rtlCol="0" anchor="t"/>
           <a:lstStyle/>
           <a:p>
-            <a:pPr indent="0" marL="0">
+            <a:pPr marL="0" indent="0">
               <a:buNone/>
             </a:pPr>
             <a:r>
@@ -10650,7 +10970,7 @@
           <a:bodyPr wrap="square" lIns="0" tIns="0" rIns="0" bIns="0" rtlCol="0" anchor="t"/>
           <a:lstStyle/>
           <a:p>
-            <a:pPr indent="0" marL="0">
+            <a:pPr marL="0" indent="0">
               <a:buNone/>
             </a:pPr>
             <a:r>
@@ -10689,7 +11009,7 @@
           <a:bodyPr wrap="square" lIns="0" tIns="0" rIns="0" bIns="0" rtlCol="0" anchor="t"/>
           <a:lstStyle/>
           <a:p>
-            <a:pPr indent="0" marL="0">
+            <a:pPr marL="0" indent="0">
               <a:buNone/>
             </a:pPr>
             <a:r>
@@ -10725,7 +11045,7 @@
           <a:bodyPr wrap="square" lIns="0" tIns="0" rIns="0" bIns="0" rtlCol="0" anchor="t"/>
           <a:lstStyle/>
           <a:p>
-            <a:pPr indent="0" marL="0">
+            <a:pPr marL="0" indent="0">
               <a:buNone/>
             </a:pPr>
             <a:r>
@@ -10766,6 +11086,13 @@
             <a:prstDash val="solid"/>
           </a:ln>
         </p:spPr>
+        <p:txBody>
+          <a:bodyPr/>
+          <a:lstStyle/>
+          <a:p>
+            <a:endParaRPr lang="en-US"/>
+          </a:p>
+        </p:txBody>
       </p:sp>
       <p:sp>
         <p:nvSpPr>
@@ -10788,7 +11115,7 @@
           <a:bodyPr wrap="square" lIns="0" tIns="0" rIns="0" bIns="0" rtlCol="0" anchor="t"/>
           <a:lstStyle/>
           <a:p>
-            <a:pPr indent="0" marL="0">
+            <a:pPr marL="0" indent="0">
               <a:buNone/>
             </a:pPr>
             <a:r>
@@ -10824,7 +11151,7 @@
           <a:bodyPr wrap="square" lIns="0" tIns="0" rIns="0" bIns="0" rtlCol="0" anchor="t"/>
           <a:lstStyle/>
           <a:p>
-            <a:pPr indent="0" marL="0">
+            <a:pPr marL="0" indent="0">
               <a:spcAft>
                 <a:spcPts val="600"/>
               </a:spcAft>
@@ -10838,24 +11165,43 @@
               </a:rPr>
               <a:t>Attack success rate (ASR): </a:t>
             </a:r>
-            <a:pPr indent="0" marL="0">
+            <a:r>
+              <a:rPr lang="en-US" sz="1400" dirty="0">
+                <a:solidFill>
+                  <a:schemeClr val="tx1"/>
+                </a:solidFill>
+              </a:rPr>
+              <a:t>attacks whose goal detector fired / attacks run</a:t>
+            </a:r>
+            <a:endParaRPr lang="en-US" sz="1400" dirty="0"/>
+          </a:p>
+          <a:p>
+            <a:pPr marL="0" indent="0">
               <a:spcAft>
                 <a:spcPts val="600"/>
               </a:spcAft>
               <a:buNone/>
             </a:pPr>
             <a:r>
+              <a:rPr lang="en-US" sz="1400" b="1" dirty="0">
+                <a:solidFill>
+                  <a:schemeClr val="tx1"/>
+                </a:solidFill>
+              </a:rPr>
+              <a:t>False-positive rate (FPR): </a:t>
+            </a:r>
+            <a:r>
               <a:rPr lang="en-US" sz="1400" dirty="0">
                 <a:solidFill>
                   <a:schemeClr val="tx1"/>
                 </a:solidFill>
               </a:rPr>
-              <a:t>attacks whose goal detector fired / attacks run</a:t>
+              <a:t>legitimate questions blocked / 35</a:t>
             </a:r>
             <a:endParaRPr lang="en-US" sz="1400" dirty="0"/>
           </a:p>
           <a:p>
-            <a:pPr indent="0" marL="0">
+            <a:pPr marL="0" indent="0">
               <a:spcAft>
                 <a:spcPts val="600"/>
               </a:spcAft>
@@ -10867,45 +11213,8 @@
                   <a:schemeClr val="tx1"/>
                 </a:solidFill>
               </a:rPr>
-              <a:t>False-positive rate (FPR): </a:t>
-            </a:r>
-            <a:pPr indent="0" marL="0">
-              <a:spcAft>
-                <a:spcPts val="600"/>
-              </a:spcAft>
-              <a:buNone/>
-            </a:pPr>
-            <a:r>
-              <a:rPr lang="en-US" sz="1400" dirty="0">
-                <a:solidFill>
-                  <a:schemeClr val="tx1"/>
-                </a:solidFill>
-              </a:rPr>
-              <a:t>legitimate questions blocked / 35</a:t>
-            </a:r>
-            <a:endParaRPr lang="en-US" sz="1400" dirty="0"/>
-          </a:p>
-          <a:p>
-            <a:pPr indent="0" marL="0">
-              <a:spcAft>
-                <a:spcPts val="600"/>
-              </a:spcAft>
-              <a:buNone/>
-            </a:pPr>
-            <a:r>
-              <a:rPr lang="en-US" sz="1400" b="1" dirty="0">
-                <a:solidFill>
-                  <a:schemeClr val="tx1"/>
-                </a:solidFill>
-              </a:rPr>
               <a:t>95% Wilson intervals </a:t>
             </a:r>
-            <a:pPr indent="0" marL="0">
-              <a:spcAft>
-                <a:spcPts val="600"/>
-              </a:spcAft>
-              <a:buNone/>
-            </a:pPr>
             <a:r>
               <a:rPr lang="en-US" sz="1400" dirty="0">
                 <a:solidFill>
@@ -10944,6 +11253,13 @@
             <a:prstDash val="solid"/>
           </a:ln>
         </p:spPr>
+        <p:txBody>
+          <a:bodyPr/>
+          <a:lstStyle/>
+          <a:p>
+            <a:endParaRPr lang="en-US"/>
+          </a:p>
+        </p:txBody>
       </p:sp>
       <p:sp>
         <p:nvSpPr>
@@ -10966,7 +11282,7 @@
           <a:bodyPr wrap="square" lIns="0" tIns="0" rIns="0" bIns="0" rtlCol="0" anchor="t"/>
           <a:lstStyle/>
           <a:p>
-            <a:pPr indent="0" marL="0">
+            <a:pPr marL="0" indent="0">
               <a:buNone/>
             </a:pPr>
             <a:r>
@@ -11095,7 +11411,7 @@
           </a:prstGeom>
           <a:extLst>
             <a:ext uri="{C572A759-6A51-4108-AA02-DFA0A04FC94B}">
-              <ma14:wrappingTextBoxFlag xmlns:ma14="http://schemas.microsoft.com/office/mac/drawingml/2011/main" val="0"/>
+              <ma14:wrappingTextBoxFlag xmlns:ma14="http://schemas.microsoft.com/office/mac/drawingml/2011/main" xmlns="" val="0"/>
             </a:ext>
           </a:extLst>
         </p:spPr>
@@ -11113,7 +11429,7 @@
           <a:p>
             <a:pPr algn="r"/>
             <a:fld id="{F7021451-1387-4CA6-816F-3879F97B5CBC}" type="slidenum">
-              <a:rPr b="0" lang="en-US"/>
+              <a:rPr lang="en-US" b="0"/>
               <a:t>6</a:t>
             </a:fld>
             <a:endParaRPr lang="en-US"/>
@@ -11148,9 +11464,11 @@
       <p:sp>
         <p:nvSpPr>
           <p:cNvPr id="2" name="Text 0"/>
-          <p:cNvSpPr/>
+          <p:cNvSpPr>
+            <a:spLocks noGrp="1"/>
+          </p:cNvSpPr>
           <p:nvPr>
-            <p:ph idx="100" type="title" hasCustomPrompt="1"/>
+            <p:ph type="title" idx="100" hasCustomPrompt="1"/>
           </p:nvPr>
         </p:nvSpPr>
         <p:spPr>
@@ -11168,7 +11486,7 @@
           <a:bodyPr wrap="square" lIns="0" tIns="0" rIns="0" bIns="0" rtlCol="0" anchor="ctr"/>
           <a:lstStyle/>
           <a:p>
-            <a:pPr algn="l" indent="0" marL="0">
+            <a:pPr marL="0" indent="0" algn="l">
               <a:buNone/>
             </a:pPr>
             <a:r>
@@ -11204,7 +11522,7 @@
           <a:bodyPr wrap="square" lIns="0" tIns="0" rIns="0" bIns="0" rtlCol="0" anchor="t"/>
           <a:lstStyle/>
           <a:p>
-            <a:pPr indent="0" marL="0">
+            <a:pPr marL="0" indent="0">
               <a:buNone/>
             </a:pPr>
             <a:r>
@@ -11243,7 +11561,7 @@
           <a:bodyPr wrap="square" lIns="0" tIns="0" rIns="0" bIns="0" rtlCol="0" anchor="t"/>
           <a:lstStyle/>
           <a:p>
-            <a:pPr indent="0" marL="0">
+            <a:pPr marL="0" indent="0">
               <a:buNone/>
             </a:pPr>
             <a:r>
@@ -11279,7 +11597,7 @@
           <a:bodyPr wrap="square" lIns="0" tIns="0" rIns="0" bIns="0" rtlCol="0" anchor="t"/>
           <a:lstStyle/>
           <a:p>
-            <a:pPr indent="0" marL="0">
+            <a:pPr marL="0" indent="0">
               <a:buNone/>
             </a:pPr>
             <a:r>
@@ -11318,7 +11636,7 @@
           <a:bodyPr wrap="square" lIns="0" tIns="0" rIns="0" bIns="0" rtlCol="0" anchor="t"/>
           <a:lstStyle/>
           <a:p>
-            <a:pPr indent="0" marL="0">
+            <a:pPr marL="0" indent="0">
               <a:buNone/>
             </a:pPr>
             <a:r>
@@ -11354,7 +11672,7 @@
           <a:bodyPr wrap="square" lIns="0" tIns="0" rIns="0" bIns="0" rtlCol="0" anchor="t"/>
           <a:lstStyle/>
           <a:p>
-            <a:pPr indent="0" marL="0">
+            <a:pPr marL="0" indent="0">
               <a:buNone/>
             </a:pPr>
             <a:r>
@@ -11393,7 +11711,7 @@
           <a:bodyPr wrap="square" lIns="0" tIns="0" rIns="0" bIns="0" rtlCol="0" anchor="t"/>
           <a:lstStyle/>
           <a:p>
-            <a:pPr indent="0" marL="0">
+            <a:pPr marL="0" indent="0">
               <a:buNone/>
             </a:pPr>
             <a:r>
@@ -11410,7 +11728,7 @@
       </p:sp>
       <p:graphicFrame>
         <p:nvGraphicFramePr>
-          <p:cNvPr id="9" name="Chart 0" descr=""/>
+          <p:cNvPr id="9" name="Chart 0"/>
           <p:cNvGraphicFramePr/>
           <p:nvPr/>
         </p:nvGraphicFramePr>
@@ -11418,9 +11736,9 @@
           <a:off x="4846320" y="1325880"/>
           <a:ext cx="6766560" cy="4343400"/>
         </p:xfrm>
-        <a:graphic xmlns:a="http://schemas.openxmlformats.org/drawingml/2006/main">
+        <a:graphic>
           <a:graphicData uri="http://schemas.openxmlformats.org/drawingml/2006/chart">
-            <c:chart xmlns:c="http://schemas.openxmlformats.org/drawingml/2006/chart" r:id="rId1"/>
+            <c:chart xmlns:c="http://schemas.openxmlformats.org/drawingml/2006/chart" xmlns:r="http://schemas.openxmlformats.org/officeDocument/2006/relationships" r:id="rId3"/>
           </a:graphicData>
         </a:graphic>
       </p:graphicFrame>
@@ -11445,7 +11763,7 @@
           <a:bodyPr wrap="square" lIns="0" tIns="0" rIns="0" bIns="0" rtlCol="0" anchor="t"/>
           <a:lstStyle/>
           <a:p>
-            <a:pPr indent="0" marL="0">
+            <a:pPr marL="0" indent="0">
               <a:buNone/>
             </a:pPr>
             <a:r>
@@ -11480,7 +11798,7 @@
           </a:prstGeom>
           <a:extLst>
             <a:ext uri="{C572A759-6A51-4108-AA02-DFA0A04FC94B}">
-              <ma14:wrappingTextBoxFlag xmlns:ma14="http://schemas.microsoft.com/office/mac/drawingml/2011/main" val="0"/>
+              <ma14:wrappingTextBoxFlag xmlns:ma14="http://schemas.microsoft.com/office/mac/drawingml/2011/main" xmlns="" val="0"/>
             </a:ext>
           </a:extLst>
         </p:spPr>
@@ -11498,7 +11816,7 @@
           <a:p>
             <a:pPr algn="r"/>
             <a:fld id="{F7021451-1387-4CA6-816F-3879F97B5CBC}" type="slidenum">
-              <a:rPr b="0" lang="en-US"/>
+              <a:rPr lang="en-US" b="0"/>
               <a:t>7</a:t>
             </a:fld>
             <a:endParaRPr lang="en-US"/>
@@ -11533,9 +11851,11 @@
       <p:sp>
         <p:nvSpPr>
           <p:cNvPr id="2" name="Text 0"/>
-          <p:cNvSpPr/>
+          <p:cNvSpPr>
+            <a:spLocks noGrp="1"/>
+          </p:cNvSpPr>
           <p:nvPr>
-            <p:ph idx="100" type="title" hasCustomPrompt="1"/>
+            <p:ph type="title" idx="100" hasCustomPrompt="1"/>
           </p:nvPr>
         </p:nvSpPr>
         <p:spPr>
@@ -11553,7 +11873,7 @@
           <a:bodyPr wrap="square" lIns="0" tIns="0" rIns="0" bIns="0" rtlCol="0" anchor="ctr"/>
           <a:lstStyle/>
           <a:p>
-            <a:pPr algn="l" indent="0" marL="0">
+            <a:pPr marL="0" indent="0" algn="l">
               <a:buNone/>
             </a:pPr>
             <a:r>
@@ -11570,7 +11890,7 @@
       </p:sp>
       <p:graphicFrame>
         <p:nvGraphicFramePr>
-          <p:cNvPr id="3" name="Chart 0" descr=""/>
+          <p:cNvPr id="3" name="Chart 0"/>
           <p:cNvGraphicFramePr/>
           <p:nvPr/>
         </p:nvGraphicFramePr>
@@ -11578,9 +11898,9 @@
           <a:off x="548640" y="1280160"/>
           <a:ext cx="7498080" cy="4846320"/>
         </p:xfrm>
-        <a:graphic xmlns:a="http://schemas.openxmlformats.org/drawingml/2006/main">
+        <a:graphic>
           <a:graphicData uri="http://schemas.openxmlformats.org/drawingml/2006/chart">
-            <c:chart xmlns:c="http://schemas.openxmlformats.org/drawingml/2006/chart" r:id="rId1"/>
+            <c:chart xmlns:c="http://schemas.openxmlformats.org/drawingml/2006/chart" xmlns:r="http://schemas.openxmlformats.org/officeDocument/2006/relationships" r:id="rId3"/>
           </a:graphicData>
         </a:graphic>
       </p:graphicFrame>
@@ -11608,17 +11928,24 @@
             <a:prstDash val="solid"/>
           </a:ln>
         </p:spPr>
+        <p:txBody>
+          <a:bodyPr/>
+          <a:lstStyle/>
+          <a:p>
+            <a:endParaRPr lang="en-US"/>
+          </a:p>
+        </p:txBody>
       </p:sp>
       <p:pic>
         <p:nvPicPr>
-          <p:cNvPr id="5" name="Image 0" descr="preencoded.png">    </p:cNvPr>
+          <p:cNvPr id="5" name="Image 0" descr="preencoded.png"/>
           <p:cNvPicPr>
             <a:picLocks noChangeAspect="1"/>
           </p:cNvPicPr>
           <p:nvPr/>
         </p:nvPicPr>
         <p:blipFill>
-          <a:blip r:embed="rId2"/>
+          <a:blip r:embed="rId4"/>
           <a:stretch>
             <a:fillRect/>
           </a:stretch>
@@ -11654,7 +11981,7 @@
           <a:bodyPr wrap="square" lIns="0" tIns="0" rIns="0" bIns="0" rtlCol="0" anchor="t"/>
           <a:lstStyle/>
           <a:p>
-            <a:pPr indent="0" marL="0">
+            <a:pPr marL="0" indent="0">
               <a:buNone/>
             </a:pPr>
             <a:r>
@@ -11668,7 +11995,7 @@
             <a:endParaRPr lang="en-US" sz="1300" dirty="0"/>
           </a:p>
           <a:p>
-            <a:pPr indent="0" marL="0">
+            <a:pPr marL="0" indent="0">
               <a:buNone/>
             </a:pPr>
             <a:r>
@@ -11707,17 +12034,24 @@
             <a:prstDash val="solid"/>
           </a:ln>
         </p:spPr>
+        <p:txBody>
+          <a:bodyPr/>
+          <a:lstStyle/>
+          <a:p>
+            <a:endParaRPr lang="en-US"/>
+          </a:p>
+        </p:txBody>
       </p:sp>
       <p:pic>
         <p:nvPicPr>
-          <p:cNvPr id="8" name="Image 1" descr="preencoded.png">    </p:cNvPr>
+          <p:cNvPr id="8" name="Image 1" descr="preencoded.png"/>
           <p:cNvPicPr>
             <a:picLocks noChangeAspect="1"/>
           </p:cNvPicPr>
           <p:nvPr/>
         </p:nvPicPr>
         <p:blipFill>
-          <a:blip r:embed="rId3"/>
+          <a:blip r:embed="rId5"/>
           <a:stretch>
             <a:fillRect/>
           </a:stretch>
@@ -11753,7 +12087,7 @@
           <a:bodyPr wrap="square" lIns="0" tIns="0" rIns="0" bIns="0" rtlCol="0" anchor="t"/>
           <a:lstStyle/>
           <a:p>
-            <a:pPr indent="0" marL="0">
+            <a:pPr marL="0" indent="0">
               <a:buNone/>
             </a:pPr>
             <a:r>
@@ -11767,7 +12101,7 @@
             <a:endParaRPr lang="en-US" sz="1300" dirty="0"/>
           </a:p>
           <a:p>
-            <a:pPr indent="0" marL="0">
+            <a:pPr marL="0" indent="0">
               <a:buNone/>
             </a:pPr>
             <a:r>
@@ -11806,17 +12140,24 @@
             <a:prstDash val="solid"/>
           </a:ln>
         </p:spPr>
+        <p:txBody>
+          <a:bodyPr/>
+          <a:lstStyle/>
+          <a:p>
+            <a:endParaRPr lang="en-US"/>
+          </a:p>
+        </p:txBody>
       </p:sp>
       <p:pic>
         <p:nvPicPr>
-          <p:cNvPr id="11" name="Image 2" descr="preencoded.png">    </p:cNvPr>
+          <p:cNvPr id="11" name="Image 2" descr="preencoded.png"/>
           <p:cNvPicPr>
             <a:picLocks noChangeAspect="1"/>
           </p:cNvPicPr>
           <p:nvPr/>
         </p:nvPicPr>
         <p:blipFill>
-          <a:blip r:embed="rId4"/>
+          <a:blip r:embed="rId6"/>
           <a:stretch>
             <a:fillRect/>
           </a:stretch>
@@ -11852,7 +12193,7 @@
           <a:bodyPr wrap="square" lIns="0" tIns="0" rIns="0" bIns="0" rtlCol="0" anchor="t"/>
           <a:lstStyle/>
           <a:p>
-            <a:pPr indent="0" marL="0">
+            <a:pPr marL="0" indent="0">
               <a:buNone/>
             </a:pPr>
             <a:r>
@@ -11866,7 +12207,7 @@
             <a:endParaRPr lang="en-US" sz="1300" dirty="0"/>
           </a:p>
           <a:p>
-            <a:pPr indent="0" marL="0">
+            <a:pPr marL="0" indent="0">
               <a:buNone/>
             </a:pPr>
             <a:r>
@@ -11901,7 +12242,7 @@
           </a:prstGeom>
           <a:extLst>
             <a:ext uri="{C572A759-6A51-4108-AA02-DFA0A04FC94B}">
-              <ma14:wrappingTextBoxFlag xmlns:ma14="http://schemas.microsoft.com/office/mac/drawingml/2011/main" val="0"/>
+              <ma14:wrappingTextBoxFlag xmlns:ma14="http://schemas.microsoft.com/office/mac/drawingml/2011/main" xmlns="" val="0"/>
             </a:ext>
           </a:extLst>
         </p:spPr>
@@ -11919,7 +12260,7 @@
           <a:p>
             <a:pPr algn="r"/>
             <a:fld id="{F7021451-1387-4CA6-816F-3879F97B5CBC}" type="slidenum">
-              <a:rPr b="0" lang="en-US"/>
+              <a:rPr lang="en-US" b="0"/>
               <a:t>8</a:t>
             </a:fld>
             <a:endParaRPr lang="en-US"/>
@@ -11954,9 +12295,11 @@
       <p:sp>
         <p:nvSpPr>
           <p:cNvPr id="2" name="Text 0"/>
-          <p:cNvSpPr/>
+          <p:cNvSpPr>
+            <a:spLocks noGrp="1"/>
+          </p:cNvSpPr>
           <p:nvPr>
-            <p:ph idx="100" type="title" hasCustomPrompt="1"/>
+            <p:ph type="title" idx="100" hasCustomPrompt="1"/>
           </p:nvPr>
         </p:nvSpPr>
         <p:spPr>
@@ -11974,7 +12317,7 @@
           <a:bodyPr wrap="square" lIns="0" tIns="0" rIns="0" bIns="0" rtlCol="0" anchor="ctr"/>
           <a:lstStyle/>
           <a:p>
-            <a:pPr algn="l" indent="0" marL="0">
+            <a:pPr marL="0" indent="0" algn="l">
               <a:buNone/>
             </a:pPr>
             <a:r>
@@ -11991,7 +12334,7 @@
       </p:sp>
       <p:graphicFrame>
         <p:nvGraphicFramePr>
-          <p:cNvPr id="3" name="Chart 0" descr=""/>
+          <p:cNvPr id="3" name="Chart 0"/>
           <p:cNvGraphicFramePr/>
           <p:nvPr/>
         </p:nvGraphicFramePr>
@@ -11999,9 +12342,9 @@
           <a:off x="548640" y="1280160"/>
           <a:ext cx="6949440" cy="4846320"/>
         </p:xfrm>
-        <a:graphic xmlns:a="http://schemas.openxmlformats.org/drawingml/2006/main">
+        <a:graphic>
           <a:graphicData uri="http://schemas.openxmlformats.org/drawingml/2006/chart">
-            <c:chart xmlns:c="http://schemas.openxmlformats.org/drawingml/2006/chart" r:id="rId1"/>
+            <c:chart xmlns:c="http://schemas.openxmlformats.org/drawingml/2006/chart" xmlns:r="http://schemas.openxmlformats.org/officeDocument/2006/relationships" r:id="rId3"/>
           </a:graphicData>
         </a:graphic>
       </p:graphicFrame>
@@ -12031,6 +12374,13 @@
             <a:prstDash val="solid"/>
           </a:ln>
         </p:spPr>
+        <p:txBody>
+          <a:bodyPr/>
+          <a:lstStyle/>
+          <a:p>
+            <a:endParaRPr lang="en-US"/>
+          </a:p>
+        </p:txBody>
       </p:sp>
       <p:sp>
         <p:nvSpPr>
@@ -12053,7 +12403,7 @@
           <a:bodyPr wrap="square" lIns="0" tIns="0" rIns="0" bIns="0" rtlCol="0" anchor="ctr"/>
           <a:lstStyle/>
           <a:p>
-            <a:pPr indent="0" marL="0">
+            <a:pPr marL="0" indent="0">
               <a:buNone/>
             </a:pPr>
             <a:r>
@@ -12067,7 +12417,7 @@
             <a:endParaRPr lang="en-US" sz="1400" dirty="0"/>
           </a:p>
           <a:p>
-            <a:pPr indent="0" marL="0">
+            <a:pPr marL="0" indent="0">
               <a:buNone/>
             </a:pPr>
             <a:r>
@@ -12108,6 +12458,13 @@
             <a:prstDash val="solid"/>
           </a:ln>
         </p:spPr>
+        <p:txBody>
+          <a:bodyPr/>
+          <a:lstStyle/>
+          <a:p>
+            <a:endParaRPr lang="en-US"/>
+          </a:p>
+        </p:txBody>
       </p:sp>
       <p:sp>
         <p:nvSpPr>
@@ -12130,7 +12487,7 @@
           <a:bodyPr wrap="square" lIns="0" tIns="0" rIns="0" bIns="0" rtlCol="0" anchor="ctr"/>
           <a:lstStyle/>
           <a:p>
-            <a:pPr indent="0" marL="0">
+            <a:pPr marL="0" indent="0">
               <a:buNone/>
             </a:pPr>
             <a:r>
@@ -12144,7 +12501,7 @@
             <a:endParaRPr lang="en-US" sz="1400" dirty="0"/>
           </a:p>
           <a:p>
-            <a:pPr indent="0" marL="0">
+            <a:pPr marL="0" indent="0">
               <a:buNone/>
             </a:pPr>
             <a:r>
@@ -12179,7 +12536,7 @@
           </a:prstGeom>
           <a:extLst>
             <a:ext uri="{C572A759-6A51-4108-AA02-DFA0A04FC94B}">
-              <ma14:wrappingTextBoxFlag xmlns:ma14="http://schemas.microsoft.com/office/mac/drawingml/2011/main" val="0"/>
+              <ma14:wrappingTextBoxFlag xmlns:ma14="http://schemas.microsoft.com/office/mac/drawingml/2011/main" xmlns="" val="0"/>
             </a:ext>
           </a:extLst>
         </p:spPr>
@@ -12197,7 +12554,7 @@
           <a:p>
             <a:pPr algn="r"/>
             <a:fld id="{F7021451-1387-4CA6-816F-3879F97B5CBC}" type="slidenum">
-              <a:rPr b="0" lang="en-US"/>
+              <a:rPr lang="en-US" b="0"/>
               <a:t>9</a:t>
             </a:fld>
             <a:endParaRPr lang="en-US"/>
@@ -12505,4 +12862,319 @@
     </a:ext>
   </a:extLst>
 </a:theme>
+</file>
+
+<file path=ppt/theme/theme2.xml><?xml version="1.0" encoding="utf-8"?>
+<a:theme xmlns:a="http://schemas.openxmlformats.org/drawingml/2006/main" name="Office Theme">
+  <a:themeElements>
+    <a:clrScheme name="Office">
+      <a:dk1>
+        <a:sysClr val="windowText" lastClr="000000"/>
+      </a:dk1>
+      <a:lt1>
+        <a:sysClr val="window" lastClr="FFFFFF"/>
+      </a:lt1>
+      <a:dk2>
+        <a:srgbClr val="0E2841"/>
+      </a:dk2>
+      <a:lt2>
+        <a:srgbClr val="E8E8E8"/>
+      </a:lt2>
+      <a:accent1>
+        <a:srgbClr val="156082"/>
+      </a:accent1>
+      <a:accent2>
+        <a:srgbClr val="E97132"/>
+      </a:accent2>
+      <a:accent3>
+        <a:srgbClr val="196B24"/>
+      </a:accent3>
+      <a:accent4>
+        <a:srgbClr val="0F9ED5"/>
+      </a:accent4>
+      <a:accent5>
+        <a:srgbClr val="A02B93"/>
+      </a:accent5>
+      <a:accent6>
+        <a:srgbClr val="4EA72E"/>
+      </a:accent6>
+      <a:hlink>
+        <a:srgbClr val="467886"/>
+      </a:hlink>
+      <a:folHlink>
+        <a:srgbClr val="96607D"/>
+      </a:folHlink>
+    </a:clrScheme>
+    <a:fontScheme name="Office">
+      <a:majorFont>
+        <a:latin typeface="Aptos Display" panose="02110004020202020204"/>
+        <a:ea typeface=""/>
+        <a:cs typeface=""/>
+        <a:font script="Jpan" typeface="游ゴシック Light"/>
+        <a:font script="Hang" typeface="맑은 고딕"/>
+        <a:font script="Hans" typeface="等线 Light"/>
+        <a:font script="Hant" typeface="新細明體"/>
+        <a:font script="Arab" typeface="Times New Roman"/>
+        <a:font script="Hebr" typeface="Times New Roman"/>
+        <a:font script="Thai" typeface="Angsana New"/>
+        <a:font script="Ethi" typeface="Nyala"/>
+        <a:font script="Beng" typeface="Vrinda"/>
+        <a:font script="Gujr" typeface="Shruti"/>
+        <a:font script="Khmr" typeface="MoolBoran"/>
+        <a:font script="Knda" typeface="Tunga"/>
+        <a:font script="Guru" typeface="Raavi"/>
+        <a:font script="Cans" typeface="Euphemia"/>
+        <a:font script="Cher" typeface="Plantagenet Cherokee"/>
+        <a:font script="Yiii" typeface="Microsoft Yi Baiti"/>
+        <a:font script="Tibt" typeface="Microsoft Himalaya"/>
+        <a:font script="Thaa" typeface="MV Boli"/>
+        <a:font script="Deva" typeface="Mangal"/>
+        <a:font script="Telu" typeface="Gautami"/>
+        <a:font script="Taml" typeface="Latha"/>
+        <a:font script="Syrc" typeface="Estrangelo Edessa"/>
+        <a:font script="Orya" typeface="Kalinga"/>
+        <a:font script="Mlym" typeface="Kartika"/>
+        <a:font script="Laoo" typeface="DokChampa"/>
+        <a:font script="Sinh" typeface="Iskoola Pota"/>
+        <a:font script="Mong" typeface="Mongolian Baiti"/>
+        <a:font script="Viet" typeface="Times New Roman"/>
+        <a:font script="Uigh" typeface="Microsoft Uighur"/>
+        <a:font script="Geor" typeface="Sylfaen"/>
+        <a:font script="Armn" typeface="Arial"/>
+        <a:font script="Bugi" typeface="Leelawadee UI"/>
+        <a:font script="Bopo" typeface="Microsoft JhengHei"/>
+        <a:font script="Java" typeface="Javanese Text"/>
+        <a:font script="Lisu" typeface="Segoe UI"/>
+        <a:font script="Mymr" typeface="Myanmar Text"/>
+        <a:font script="Nkoo" typeface="Ebrima"/>
+        <a:font script="Olck" typeface="Nirmala UI"/>
+        <a:font script="Osma" typeface="Ebrima"/>
+        <a:font script="Phag" typeface="Phagspa"/>
+        <a:font script="Syrn" typeface="Estrangelo Edessa"/>
+        <a:font script="Syrj" typeface="Estrangelo Edessa"/>
+        <a:font script="Syre" typeface="Estrangelo Edessa"/>
+        <a:font script="Sora" typeface="Nirmala UI"/>
+        <a:font script="Tale" typeface="Microsoft Tai Le"/>
+        <a:font script="Talu" typeface="Microsoft New Tai Lue"/>
+        <a:font script="Tfng" typeface="Ebrima"/>
+      </a:majorFont>
+      <a:minorFont>
+        <a:latin typeface="Aptos" panose="02110004020202020204"/>
+        <a:ea typeface=""/>
+        <a:cs typeface=""/>
+        <a:font script="Jpan" typeface="游ゴシック"/>
+        <a:font script="Hang" typeface="맑은 고딕"/>
+        <a:font script="Hans" typeface="等线"/>
+        <a:font script="Hant" typeface="新細明體"/>
+        <a:font script="Arab" typeface="Arial"/>
+        <a:font script="Hebr" typeface="Arial"/>
+        <a:font script="Thai" typeface="Cordia New"/>
+        <a:font script="Ethi" typeface="Nyala"/>
+        <a:font script="Beng" typeface="Vrinda"/>
+        <a:font script="Gujr" typeface="Shruti"/>
+        <a:font script="Khmr" typeface="DaunPenh"/>
+        <a:font script="Knda" typeface="Tunga"/>
+        <a:font script="Guru" typeface="Raavi"/>
+        <a:font script="Cans" typeface="Euphemia"/>
+        <a:font script="Cher" typeface="Plantagenet Cherokee"/>
+        <a:font script="Yiii" typeface="Microsoft Yi Baiti"/>
+        <a:font script="Tibt" typeface="Microsoft Himalaya"/>
+        <a:font script="Thaa" typeface="MV Boli"/>
+        <a:font script="Deva" typeface="Mangal"/>
+        <a:font script="Telu" typeface="Gautami"/>
+        <a:font script="Taml" typeface="Latha"/>
+        <a:font script="Syrc" typeface="Estrangelo Edessa"/>
+        <a:font script="Orya" typeface="Kalinga"/>
+        <a:font script="Mlym" typeface="Kartika"/>
+        <a:font script="Laoo" typeface="DokChampa"/>
+        <a:font script="Sinh" typeface="Iskoola Pota"/>
+        <a:font script="Mong" typeface="Mongolian Baiti"/>
+        <a:font script="Viet" typeface="Arial"/>
+        <a:font script="Uigh" typeface="Microsoft Uighur"/>
+        <a:font script="Geor" typeface="Sylfaen"/>
+        <a:font script="Armn" typeface="Arial"/>
+        <a:font script="Bugi" typeface="Leelawadee UI"/>
+        <a:font script="Bopo" typeface="Microsoft JhengHei"/>
+        <a:font script="Java" typeface="Javanese Text"/>
+        <a:font script="Lisu" typeface="Segoe UI"/>
+        <a:font script="Mymr" typeface="Myanmar Text"/>
+        <a:font script="Nkoo" typeface="Ebrima"/>
+        <a:font script="Olck" typeface="Nirmala UI"/>
+        <a:font script="Osma" typeface="Ebrima"/>
+        <a:font script="Phag" typeface="Phagspa"/>
+        <a:font script="Syrn" typeface="Estrangelo Edessa"/>
+        <a:font script="Syrj" typeface="Estrangelo Edessa"/>
+        <a:font script="Syre" typeface="Estrangelo Edessa"/>
+        <a:font script="Sora" typeface="Nirmala UI"/>
+        <a:font script="Tale" typeface="Microsoft Tai Le"/>
+        <a:font script="Talu" typeface="Microsoft New Tai Lue"/>
+        <a:font script="Tfng" typeface="Ebrima"/>
+      </a:minorFont>
+    </a:fontScheme>
+    <a:fmtScheme name="Office">
+      <a:fillStyleLst>
+        <a:solidFill>
+          <a:schemeClr val="phClr"/>
+        </a:solidFill>
+        <a:gradFill rotWithShape="1">
+          <a:gsLst>
+            <a:gs pos="0">
+              <a:schemeClr val="phClr">
+                <a:lumMod val="110000"/>
+                <a:satMod val="105000"/>
+                <a:tint val="67000"/>
+              </a:schemeClr>
+            </a:gs>
+            <a:gs pos="50000">
+              <a:schemeClr val="phClr">
+                <a:lumMod val="105000"/>
+                <a:satMod val="103000"/>
+                <a:tint val="73000"/>
+              </a:schemeClr>
+            </a:gs>
+            <a:gs pos="100000">
+              <a:schemeClr val="phClr">
+                <a:lumMod val="105000"/>
+                <a:satMod val="109000"/>
+                <a:tint val="81000"/>
+              </a:schemeClr>
+            </a:gs>
+          </a:gsLst>
+          <a:lin ang="5400000" scaled="0"/>
+        </a:gradFill>
+        <a:gradFill rotWithShape="1">
+          <a:gsLst>
+            <a:gs pos="0">
+              <a:schemeClr val="phClr">
+                <a:satMod val="103000"/>
+                <a:lumMod val="102000"/>
+                <a:tint val="94000"/>
+              </a:schemeClr>
+            </a:gs>
+            <a:gs pos="50000">
+              <a:schemeClr val="phClr">
+                <a:satMod val="110000"/>
+                <a:lumMod val="100000"/>
+                <a:shade val="100000"/>
+              </a:schemeClr>
+            </a:gs>
+            <a:gs pos="100000">
+              <a:schemeClr val="phClr">
+                <a:lumMod val="99000"/>
+                <a:satMod val="120000"/>
+                <a:shade val="78000"/>
+              </a:schemeClr>
+            </a:gs>
+          </a:gsLst>
+          <a:lin ang="5400000" scaled="0"/>
+        </a:gradFill>
+      </a:fillStyleLst>
+      <a:lnStyleLst>
+        <a:ln w="12700" cap="flat" cmpd="sng" algn="ctr">
+          <a:solidFill>
+            <a:schemeClr val="phClr"/>
+          </a:solidFill>
+          <a:prstDash val="solid"/>
+          <a:miter lim="800000"/>
+        </a:ln>
+        <a:ln w="19050" cap="flat" cmpd="sng" algn="ctr">
+          <a:solidFill>
+            <a:schemeClr val="phClr"/>
+          </a:solidFill>
+          <a:prstDash val="solid"/>
+          <a:miter lim="800000"/>
+        </a:ln>
+        <a:ln w="25400" cap="flat" cmpd="sng" algn="ctr">
+          <a:solidFill>
+            <a:schemeClr val="phClr"/>
+          </a:solidFill>
+          <a:prstDash val="solid"/>
+          <a:miter lim="800000"/>
+        </a:ln>
+      </a:lnStyleLst>
+      <a:effectStyleLst>
+        <a:effectStyle>
+          <a:effectLst/>
+        </a:effectStyle>
+        <a:effectStyle>
+          <a:effectLst/>
+        </a:effectStyle>
+        <a:effectStyle>
+          <a:effectLst>
+            <a:outerShdw blurRad="57150" dist="19050" dir="5400000" algn="ctr" rotWithShape="0">
+              <a:srgbClr val="000000">
+                <a:alpha val="63000"/>
+              </a:srgbClr>
+            </a:outerShdw>
+          </a:effectLst>
+        </a:effectStyle>
+      </a:effectStyleLst>
+      <a:bgFillStyleLst>
+        <a:solidFill>
+          <a:schemeClr val="phClr"/>
+        </a:solidFill>
+        <a:solidFill>
+          <a:schemeClr val="phClr">
+            <a:tint val="95000"/>
+            <a:satMod val="170000"/>
+          </a:schemeClr>
+        </a:solidFill>
+        <a:gradFill rotWithShape="1">
+          <a:gsLst>
+            <a:gs pos="0">
+              <a:schemeClr val="phClr">
+                <a:tint val="93000"/>
+                <a:satMod val="150000"/>
+                <a:shade val="98000"/>
+                <a:lumMod val="102000"/>
+              </a:schemeClr>
+            </a:gs>
+            <a:gs pos="50000">
+              <a:schemeClr val="phClr">
+                <a:tint val="98000"/>
+                <a:satMod val="130000"/>
+                <a:shade val="90000"/>
+                <a:lumMod val="103000"/>
+              </a:schemeClr>
+            </a:gs>
+            <a:gs pos="100000">
+              <a:schemeClr val="phClr">
+                <a:shade val="63000"/>
+                <a:satMod val="120000"/>
+              </a:schemeClr>
+            </a:gs>
+          </a:gsLst>
+          <a:lin ang="5400000" scaled="0"/>
+        </a:gradFill>
+      </a:bgFillStyleLst>
+    </a:fmtScheme>
+  </a:themeElements>
+  <a:objectDefaults>
+    <a:lnDef>
+      <a:spPr/>
+      <a:bodyPr/>
+      <a:lstStyle/>
+      <a:style>
+        <a:lnRef idx="2">
+          <a:schemeClr val="accent1"/>
+        </a:lnRef>
+        <a:fillRef idx="0">
+          <a:schemeClr val="accent1"/>
+        </a:fillRef>
+        <a:effectRef idx="1">
+          <a:schemeClr val="accent1"/>
+        </a:effectRef>
+        <a:fontRef idx="minor">
+          <a:schemeClr val="tx1"/>
+        </a:fontRef>
+      </a:style>
+    </a:lnDef>
+  </a:objectDefaults>
+  <a:extraClrSchemeLst/>
+  <a:extLst>
+    <a:ext uri="{05A4C25C-085E-4340-85A3-A5531E510DB2}">
+      <thm15:themeFamily xmlns:thm15="http://schemas.microsoft.com/office/thememl/2012/main" name="Office Theme" id="{2E142A2C-CD16-42D6-873A-C26D2A0506FA}" vid="{1BDDFF52-6CD6-40A5-AB3C-68EB2F1E4D0A}"/>
+    </a:ext>
+  </a:extLst>
+</a:theme>
 </file>